--- a/assets/科研论文核查员.pptx
+++ b/assets/科研论文核查员.pptx
@@ -3773,7 +3773,7 @@
                 <a:latin typeface="PingFang SC"/>
                 <a:ea typeface="PingFang SC"/>
               </a:rPr>
-              <a:t>主办：香港城市大学 HKAI-Sci    |    参赛形式：个人参赛    |    提交截止：2026-10-31</a:t>
+              <a:t>主办：香港城市大学 HKAI-Sci    |    参赛：邹亮明 · 邹晶晶    |    提交截止：2026-10-31</a:t>
             </a:r>
           </a:p>
         </p:txBody>
@@ -3881,7 +3881,7 @@
                 <a:latin typeface="PingFang SC"/>
                 <a:ea typeface="PingFang SC"/>
               </a:rPr>
-              <a:t>问题：引用幻觉是沉默的科研系统性风险</a:t>
+              <a:t>问题：模型凭记忆无法可靠识别引用幻觉</a:t>
             </a:r>
           </a:p>
         </p:txBody>
@@ -7664,7 +7664,7 @@
                 <a:latin typeface="PingFang SC"/>
                 <a:ea typeface="PingFang SC"/>
               </a:rPr>
-              <a:t>· 金标准由 Crossref 实时构造（valid / not_found / mismatch）；伪造 DOI 用过去年份、同格式仅篡改后缀并实时验证 404，杜绝靠“未来年份”蒙对。</a:t>
+              <a:t>· 金标准由 Crossref 实时构造（valid / not_found / mismatch）；伪造 DOI 用过去年份、同格式仅篡改后缀并实时验证 404，避免靠未来年份推断。</a:t>
             </a:r>
           </a:p>
           <a:p>
@@ -8575,7 +8575,7 @@
                 <a:latin typeface="PingFang SC"/>
                 <a:ea typeface="PingFang SC"/>
               </a:rPr>
-              <a:t>沙箱 scipy 复算揪出 p 值造假：报告 0.03/0.04，实算 0.206/0.138</a:t>
+              <a:t>沙箱 scipy 复算发现 p 值与数据矛盾：报告 0.03/0.04，实算 0.206/0.138</a:t>
             </a:r>
           </a:p>
         </p:txBody>

--- a/assets/科研论文核查员.pptx
+++ b/assets/科研论文核查员.pptx
@@ -6831,7 +6831,7 @@
                 <a:latin typeface="PingFang SC"/>
                 <a:ea typeface="PingFang SC"/>
               </a:rPr>
-              <a:t>结果：48 条金标准测试，零误报、零漏报</a:t>
+              <a:t>结果：联网是决定性闸门（F1 0.62→1.0），专家流程固化确定性</a:t>
             </a:r>
           </a:p>
         </p:txBody>
@@ -6877,7 +6877,7 @@
                 <a:latin typeface="PingFang SC"/>
                 <a:ea typeface="PingFang SC"/>
               </a:rPr>
-              <a:t>独立测试集（未参与调参），离线对照经 SSE 审计确认公平</a:t>
+              <a:t>48 条独立测试集；三方对照（离线 / 普通联网 / 专家工作流），SSE 审计确认公平</a:t>
             </a:r>
           </a:p>
         </p:txBody>
@@ -6988,8 +6988,8 @@
         </p:blipFill>
         <p:spPr>
           <a:xfrm>
-            <a:off x="502920" y="1874519"/>
-            <a:ext cx="5074920" cy="3327816"/>
+            <a:off x="502920" y="1828800"/>
+            <a:ext cx="5029200" cy="3297836"/>
           </a:xfrm>
           <a:prstGeom prst="rect">
             <a:avLst/>
@@ -7005,8 +7005,8 @@
           <p:nvPr/>
         </p:nvGraphicFramePr>
         <p:xfrm>
-          <a:off x="6720840" y="1965960"/>
-          <a:ext cx="4935930" cy="2286000"/>
+          <a:off x="6720840" y="1920240"/>
+          <a:ext cx="4937760" cy="2286000"/>
         </p:xfrm>
         <a:graphic>
           <a:graphicData uri="http://schemas.openxmlformats.org/drawingml/2006/table">
@@ -7015,10 +7015,10 @@
                 <a:tableStyleId>{5C22544A-7EE6-4342-B048-85BDC9FD1C3A}</a:tableStyleId>
               </a:tblPr>
               <a:tblGrid>
-                <a:gridCol w="1737360"/>
-                <a:gridCol w="1066190"/>
-                <a:gridCol w="1066190"/>
-                <a:gridCol w="1066190"/>
+                <a:gridCol w="1481328"/>
+                <a:gridCol w="1152144"/>
+                <a:gridCol w="1152144"/>
+                <a:gridCol w="1152144"/>
               </a:tblGrid>
               <a:tr h="571500">
                 <a:tc>
@@ -7028,7 +7028,7 @@
                     <a:p>
                       <a:pPr algn="l"/>
                       <a:r>
-                        <a:rPr sz="1300" b="1">
+                        <a:rPr sz="1250" b="1">
                           <a:solidFill>
                             <a:srgbClr val="FFFFFF"/>
                           </a:solidFill>
@@ -7052,14 +7052,14 @@
                     <a:p>
                       <a:pPr algn="ctr"/>
                       <a:r>
-                        <a:rPr sz="1300" b="1">
+                        <a:rPr sz="1250" b="1">
                           <a:solidFill>
                             <a:srgbClr val="FFFFFF"/>
                           </a:solidFill>
                           <a:latin typeface="PingFang SC"/>
                           <a:ea typeface="PingFang SC"/>
                         </a:rPr>
-                        <a:t>核查员 F1</a:t>
+                        <a:t>离线基线</a:t>
                       </a:r>
                     </a:p>
                   </a:txBody>
@@ -7076,14 +7076,14 @@
                     <a:p>
                       <a:pPr algn="ctr"/>
                       <a:r>
-                        <a:rPr sz="1300" b="1">
+                        <a:rPr sz="1250" b="1">
                           <a:solidFill>
                             <a:srgbClr val="FFFFFF"/>
                           </a:solidFill>
                           <a:latin typeface="PingFang SC"/>
                           <a:ea typeface="PingFang SC"/>
                         </a:rPr>
-                        <a:t>基线 F1</a:t>
+                        <a:t>普通联网</a:t>
                       </a:r>
                     </a:p>
                   </a:txBody>
@@ -7100,14 +7100,14 @@
                     <a:p>
                       <a:pPr algn="ctr"/>
                       <a:r>
-                        <a:rPr sz="1300" b="1">
+                        <a:rPr sz="1250" b="1">
                           <a:solidFill>
                             <a:srgbClr val="FFFFFF"/>
                           </a:solidFill>
                           <a:latin typeface="PingFang SC"/>
                           <a:ea typeface="PingFang SC"/>
                         </a:rPr>
-                        <a:t>核查员误报</a:t>
+                        <a:t>专家工作流</a:t>
                       </a:r>
                     </a:p>
                   </a:txBody>
@@ -7152,31 +7152,7 @@
                       <a:r>
                         <a:rPr sz="1400" b="1">
                           <a:solidFill>
-                            <a:srgbClr val="2E8B57"/>
-                          </a:solidFill>
-                          <a:latin typeface="PingFang SC"/>
-                          <a:ea typeface="PingFang SC"/>
-                        </a:rPr>
-                        <a:t>1.00</a:t>
-                      </a:r>
-                    </a:p>
-                  </a:txBody>
-                  <a:tcPr anchor="ctr">
-                    <a:solidFill>
-                      <a:srgbClr val="F4F6F9"/>
-                    </a:solidFill>
-                  </a:tcPr>
-                </a:tc>
-                <a:tc>
-                  <a:txBody>
-                    <a:bodyPr/>
-                    <a:lstStyle/>
-                    <a:p>
-                      <a:pPr algn="ctr"/>
-                      <a:r>
-                        <a:rPr sz="1400" b="0">
-                          <a:solidFill>
-                            <a:srgbClr val="1A1B1C"/>
+                            <a:srgbClr val="C0392B"/>
                           </a:solidFill>
                           <a:latin typeface="PingFang SC"/>
                           <a:ea typeface="PingFang SC"/>
@@ -7200,12 +7176,36 @@
                       <a:r>
                         <a:rPr sz="1400" b="1">
                           <a:solidFill>
+                            <a:srgbClr val="4F6B9A"/>
+                          </a:solidFill>
+                          <a:latin typeface="PingFang SC"/>
+                          <a:ea typeface="PingFang SC"/>
+                        </a:rPr>
+                        <a:t>1.00</a:t>
+                      </a:r>
+                    </a:p>
+                  </a:txBody>
+                  <a:tcPr anchor="ctr">
+                    <a:solidFill>
+                      <a:srgbClr val="F4F6F9"/>
+                    </a:solidFill>
+                  </a:tcPr>
+                </a:tc>
+                <a:tc>
+                  <a:txBody>
+                    <a:bodyPr/>
+                    <a:lstStyle/>
+                    <a:p>
+                      <a:pPr algn="ctr"/>
+                      <a:r>
+                        <a:rPr sz="1400" b="1">
+                          <a:solidFill>
                             <a:srgbClr val="2E8B57"/>
                           </a:solidFill>
                           <a:latin typeface="PingFang SC"/>
                           <a:ea typeface="PingFang SC"/>
                         </a:rPr>
-                        <a:t>0</a:t>
+                        <a:t>1.00</a:t>
                       </a:r>
                     </a:p>
                   </a:txBody>
@@ -7250,31 +7250,7 @@
                       <a:r>
                         <a:rPr sz="1400" b="1">
                           <a:solidFill>
-                            <a:srgbClr val="2E8B57"/>
-                          </a:solidFill>
-                          <a:latin typeface="PingFang SC"/>
-                          <a:ea typeface="PingFang SC"/>
-                        </a:rPr>
-                        <a:t>1.00</a:t>
-                      </a:r>
-                    </a:p>
-                  </a:txBody>
-                  <a:tcPr anchor="ctr">
-                    <a:solidFill>
-                      <a:srgbClr val="FFFFFF"/>
-                    </a:solidFill>
-                  </a:tcPr>
-                </a:tc>
-                <a:tc>
-                  <a:txBody>
-                    <a:bodyPr/>
-                    <a:lstStyle/>
-                    <a:p>
-                      <a:pPr algn="ctr"/>
-                      <a:r>
-                        <a:rPr sz="1400" b="0">
-                          <a:solidFill>
-                            <a:srgbClr val="1A1B1C"/>
+                            <a:srgbClr val="C0392B"/>
                           </a:solidFill>
                           <a:latin typeface="PingFang SC"/>
                           <a:ea typeface="PingFang SC"/>
@@ -7298,12 +7274,36 @@
                       <a:r>
                         <a:rPr sz="1400" b="1">
                           <a:solidFill>
+                            <a:srgbClr val="4F6B9A"/>
+                          </a:solidFill>
+                          <a:latin typeface="PingFang SC"/>
+                          <a:ea typeface="PingFang SC"/>
+                        </a:rPr>
+                        <a:t>1.00</a:t>
+                      </a:r>
+                    </a:p>
+                  </a:txBody>
+                  <a:tcPr anchor="ctr">
+                    <a:solidFill>
+                      <a:srgbClr val="FFFFFF"/>
+                    </a:solidFill>
+                  </a:tcPr>
+                </a:tc>
+                <a:tc>
+                  <a:txBody>
+                    <a:bodyPr/>
+                    <a:lstStyle/>
+                    <a:p>
+                      <a:pPr algn="ctr"/>
+                      <a:r>
+                        <a:rPr sz="1400" b="1">
+                          <a:solidFill>
                             <a:srgbClr val="2E8B57"/>
                           </a:solidFill>
                           <a:latin typeface="PingFang SC"/>
                           <a:ea typeface="PingFang SC"/>
                         </a:rPr>
-                        <a:t>0</a:t>
+                        <a:t>1.00</a:t>
                       </a:r>
                     </a:p>
                   </a:txBody>
@@ -7348,31 +7348,7 @@
                       <a:r>
                         <a:rPr sz="1400" b="1">
                           <a:solidFill>
-                            <a:srgbClr val="2E8B57"/>
-                          </a:solidFill>
-                          <a:latin typeface="PingFang SC"/>
-                          <a:ea typeface="PingFang SC"/>
-                        </a:rPr>
-                        <a:t>1.00</a:t>
-                      </a:r>
-                    </a:p>
-                  </a:txBody>
-                  <a:tcPr anchor="ctr">
-                    <a:solidFill>
-                      <a:srgbClr val="F4F6F9"/>
-                    </a:solidFill>
-                  </a:tcPr>
-                </a:tc>
-                <a:tc>
-                  <a:txBody>
-                    <a:bodyPr/>
-                    <a:lstStyle/>
-                    <a:p>
-                      <a:pPr algn="ctr"/>
-                      <a:r>
-                        <a:rPr sz="1400" b="0">
-                          <a:solidFill>
-                            <a:srgbClr val="1A1B1C"/>
+                            <a:srgbClr val="C0392B"/>
                           </a:solidFill>
                           <a:latin typeface="PingFang SC"/>
                           <a:ea typeface="PingFang SC"/>
@@ -7396,12 +7372,36 @@
                       <a:r>
                         <a:rPr sz="1400" b="1">
                           <a:solidFill>
+                            <a:srgbClr val="4F6B9A"/>
+                          </a:solidFill>
+                          <a:latin typeface="PingFang SC"/>
+                          <a:ea typeface="PingFang SC"/>
+                        </a:rPr>
+                        <a:t>1.00</a:t>
+                      </a:r>
+                    </a:p>
+                  </a:txBody>
+                  <a:tcPr anchor="ctr">
+                    <a:solidFill>
+                      <a:srgbClr val="F4F6F9"/>
+                    </a:solidFill>
+                  </a:tcPr>
+                </a:tc>
+                <a:tc>
+                  <a:txBody>
+                    <a:bodyPr/>
+                    <a:lstStyle/>
+                    <a:p>
+                      <a:pPr algn="ctr"/>
+                      <a:r>
+                        <a:rPr sz="1400" b="1">
+                          <a:solidFill>
                             <a:srgbClr val="2E8B57"/>
                           </a:solidFill>
                           <a:latin typeface="PingFang SC"/>
                           <a:ea typeface="PingFang SC"/>
                         </a:rPr>
-                        <a:t>0</a:t>
+                        <a:t>1.00</a:t>
                       </a:r>
                     </a:p>
                   </a:txBody>
@@ -7424,8 +7424,8 @@
         </p:nvSpPr>
         <p:spPr>
           <a:xfrm>
-            <a:off x="6720840" y="4572000"/>
-            <a:ext cx="4937760" cy="749808"/>
+            <a:off x="6720840" y="4526280"/>
+            <a:ext cx="4937760" cy="1078992"/>
           </a:xfrm>
           <a:prstGeom prst="roundRect">
             <a:avLst>
@@ -7470,8 +7470,8 @@
         </p:nvSpPr>
         <p:spPr>
           <a:xfrm>
-            <a:off x="6949440" y="4572000"/>
-            <a:ext cx="4572000" cy="749808"/>
+            <a:off x="6949440" y="4553712"/>
+            <a:ext cx="4572000" cy="1042415"/>
           </a:xfrm>
           <a:prstGeom prst="rect">
             <a:avLst/>
@@ -7480,6 +7480,190 @@
         </p:spPr>
         <p:txBody>
           <a:bodyPr wrap="square" anchor="ctr" lIns="25400" rIns="25400" tIns="12700" bIns="12700">
+            <a:spAutoFit/>
+          </a:bodyPr>
+          <a:lstStyle/>
+          <a:p>
+            <a:pPr algn="l">
+              <a:lnSpc>
+                <a:spcPct val="112000"/>
+              </a:lnSpc>
+              <a:spcBef>
+                <a:spcPts val="0"/>
+              </a:spcBef>
+              <a:spcAft>
+                <a:spcPts val="200"/>
+              </a:spcAft>
+            </a:pPr>
+            <a:r>
+              <a:rPr sz="1350" b="1">
+                <a:solidFill>
+                  <a:srgbClr val="2E8B57"/>
+                </a:solidFill>
+                <a:latin typeface="PingFang SC"/>
+                <a:ea typeface="PingFang SC"/>
+              </a:rPr>
+              <a:t>两个联网方法均 0 误报 / 0 漏报</a:t>
+            </a:r>
+          </a:p>
+          <a:p>
+            <a:pPr algn="l">
+              <a:lnSpc>
+                <a:spcPct val="112000"/>
+              </a:lnSpc>
+              <a:spcBef>
+                <a:spcPts val="0"/>
+              </a:spcBef>
+              <a:spcAft>
+                <a:spcPts val="200"/>
+              </a:spcAft>
+            </a:pPr>
+            <a:r>
+              <a:rPr sz="1200" b="1">
+                <a:solidFill>
+                  <a:srgbClr val="C0392B"/>
+                </a:solidFill>
+                <a:latin typeface="PingFang SC"/>
+                <a:ea typeface="PingFang SC"/>
+              </a:rPr>
+              <a:t>离线基线：合计 23 次误报、7 次漏报</a:t>
+            </a:r>
+          </a:p>
+          <a:p>
+            <a:pPr algn="l">
+              <a:lnSpc>
+                <a:spcPct val="112000"/>
+              </a:lnSpc>
+              <a:spcBef>
+                <a:spcPts val="0"/>
+              </a:spcBef>
+              <a:spcAft>
+                <a:spcPts val="200"/>
+              </a:spcAft>
+            </a:pPr>
+            <a:r>
+              <a:rPr sz="1100" b="1">
+                <a:solidFill>
+                  <a:srgbClr val="1B3A6B"/>
+                </a:solidFill>
+                <a:latin typeface="PingFang SC"/>
+                <a:ea typeface="PingFang SC"/>
+              </a:rPr>
+              <a:t>强模型上专家流程无额外 F1 增益，价值在确定性</a:t>
+            </a:r>
+          </a:p>
+        </p:txBody>
+      </p:sp>
+      <p:sp>
+        <p:nvSpPr>
+          <p:cNvPr id="11" name="Rounded Rectangle 10"/>
+          <p:cNvSpPr/>
+          <p:nvPr/>
+        </p:nvSpPr>
+        <p:spPr>
+          <a:xfrm>
+            <a:off x="502920" y="5806440"/>
+            <a:ext cx="11155680" cy="914400"/>
+          </a:xfrm>
+          <a:prstGeom prst="roundRect">
+            <a:avLst>
+              <a:gd name="adj" fmla="val 8000"/>
+            </a:avLst>
+          </a:prstGeom>
+          <a:solidFill>
+            <a:srgbClr val="F4F6F9"/>
+          </a:solidFill>
+          <a:ln>
+            <a:noFill/>
+          </a:ln>
+          <a:effectLst/>
+        </p:spPr>
+        <p:style>
+          <a:lnRef idx="1">
+            <a:schemeClr val="accent1"/>
+          </a:lnRef>
+          <a:fillRef idx="3">
+            <a:schemeClr val="accent1"/>
+          </a:fillRef>
+          <a:effectRef idx="2">
+            <a:schemeClr val="accent1"/>
+          </a:effectRef>
+          <a:fontRef idx="minor">
+            <a:schemeClr val="lt1"/>
+          </a:fontRef>
+        </p:style>
+        <p:txBody>
+          <a:bodyPr rtlCol="0" anchor="ctr"/>
+          <a:lstStyle/>
+          <a:p>
+            <a:pPr algn="ctr"/>
+          </a:p>
+        </p:txBody>
+      </p:sp>
+      <p:sp>
+        <p:nvSpPr>
+          <p:cNvPr id="12" name="TextBox 11"/>
+          <p:cNvSpPr txBox="1"/>
+          <p:nvPr/>
+        </p:nvSpPr>
+        <p:spPr>
+          <a:xfrm>
+            <a:off x="731520" y="5870448"/>
+            <a:ext cx="10972800" cy="274320"/>
+          </a:xfrm>
+          <a:prstGeom prst="rect">
+            <a:avLst/>
+          </a:prstGeom>
+          <a:noFill/>
+        </p:spPr>
+        <p:txBody>
+          <a:bodyPr wrap="square" anchor="t" lIns="25400" rIns="25400" tIns="12700" bIns="12700">
+            <a:spAutoFit/>
+          </a:bodyPr>
+          <a:lstStyle/>
+          <a:p>
+            <a:pPr algn="l">
+              <a:lnSpc>
+                <a:spcPct val="105000"/>
+              </a:lnSpc>
+              <a:spcBef>
+                <a:spcPts val="0"/>
+              </a:spcBef>
+              <a:spcAft>
+                <a:spcPts val="600"/>
+              </a:spcAft>
+            </a:pPr>
+            <a:r>
+              <a:rPr sz="1300" b="1">
+                <a:solidFill>
+                  <a:srgbClr val="1B3A6B"/>
+                </a:solidFill>
+                <a:latin typeface="PingFang SC"/>
+                <a:ea typeface="PingFang SC"/>
+              </a:rPr>
+              <a:t>对照严谨性与诚实结论</a:t>
+            </a:r>
+          </a:p>
+        </p:txBody>
+      </p:sp>
+      <p:sp>
+        <p:nvSpPr>
+          <p:cNvPr id="13" name="TextBox 12"/>
+          <p:cNvSpPr txBox="1"/>
+          <p:nvPr/>
+        </p:nvSpPr>
+        <p:spPr>
+          <a:xfrm>
+            <a:off x="731520" y="6144768"/>
+            <a:ext cx="10881360" cy="548640"/>
+          </a:xfrm>
+          <a:prstGeom prst="rect">
+            <a:avLst/>
+          </a:prstGeom>
+          <a:noFill/>
+        </p:spPr>
+        <p:txBody>
+          <a:bodyPr wrap="square" anchor="t" lIns="25400" rIns="25400" tIns="12700" bIns="12700">
             <a:spAutoFit/>
           </a:bodyPr>
           <a:lstStyle/>
@@ -7496,14 +7680,14 @@
               </a:spcAft>
             </a:pPr>
             <a:r>
-              <a:rPr sz="1400" b="1">
-                <a:solidFill>
-                  <a:srgbClr val="2E8B57"/>
+              <a:rPr sz="1100" b="0">
+                <a:solidFill>
+                  <a:srgbClr val="1A1B1C"/>
                 </a:solidFill>
                 <a:latin typeface="PingFang SC"/>
                 <a:ea typeface="PingFang SC"/>
               </a:rPr>
-              <a:t>核查员：0 误报 / 0 漏报</a:t>
+              <a:t>· 增设工具全开、能联网但不给专家流程的普通 Agent 作对照，防止稻草人基线；撤稿、统计复算、2026 冷门撤稿限定任务同输入对照，两个联网 Agent 都能做对。</a:t>
             </a:r>
           </a:p>
           <a:p>
@@ -7519,175 +7703,14 @@
               </a:spcAft>
             </a:pPr>
             <a:r>
-              <a:rPr sz="1250" b="1">
-                <a:solidFill>
-                  <a:srgbClr val="C0392B"/>
+              <a:rPr sz="1100" b="0">
+                <a:solidFill>
+                  <a:srgbClr val="1A1B1C"/>
                 </a:solidFill>
                 <a:latin typeface="PingFang SC"/>
                 <a:ea typeface="PingFang SC"/>
               </a:rPr>
-              <a:t>离线基线：合计 23 次误报、7 次漏报</a:t>
-            </a:r>
-          </a:p>
-        </p:txBody>
-      </p:sp>
-      <p:sp>
-        <p:nvSpPr>
-          <p:cNvPr id="11" name="Rounded Rectangle 10"/>
-          <p:cNvSpPr/>
-          <p:nvPr/>
-        </p:nvSpPr>
-        <p:spPr>
-          <a:xfrm>
-            <a:off x="502920" y="5504688"/>
-            <a:ext cx="11155680" cy="1078992"/>
-          </a:xfrm>
-          <a:prstGeom prst="roundRect">
-            <a:avLst>
-              <a:gd name="adj" fmla="val 8000"/>
-            </a:avLst>
-          </a:prstGeom>
-          <a:solidFill>
-            <a:srgbClr val="F4F6F9"/>
-          </a:solidFill>
-          <a:ln>
-            <a:noFill/>
-          </a:ln>
-          <a:effectLst/>
-        </p:spPr>
-        <p:style>
-          <a:lnRef idx="1">
-            <a:schemeClr val="accent1"/>
-          </a:lnRef>
-          <a:fillRef idx="3">
-            <a:schemeClr val="accent1"/>
-          </a:fillRef>
-          <a:effectRef idx="2">
-            <a:schemeClr val="accent1"/>
-          </a:effectRef>
-          <a:fontRef idx="minor">
-            <a:schemeClr val="lt1"/>
-          </a:fontRef>
-        </p:style>
-        <p:txBody>
-          <a:bodyPr rtlCol="0" anchor="ctr"/>
-          <a:lstStyle/>
-          <a:p>
-            <a:pPr algn="ctr"/>
-          </a:p>
-        </p:txBody>
-      </p:sp>
-      <p:sp>
-        <p:nvSpPr>
-          <p:cNvPr id="12" name="TextBox 11"/>
-          <p:cNvSpPr txBox="1"/>
-          <p:nvPr/>
-        </p:nvSpPr>
-        <p:spPr>
-          <a:xfrm>
-            <a:off x="731520" y="5596128"/>
-            <a:ext cx="10972800" cy="320040"/>
-          </a:xfrm>
-          <a:prstGeom prst="rect">
-            <a:avLst/>
-          </a:prstGeom>
-          <a:noFill/>
-        </p:spPr>
-        <p:txBody>
-          <a:bodyPr wrap="square" anchor="t" lIns="25400" rIns="25400" tIns="12700" bIns="12700">
-            <a:spAutoFit/>
-          </a:bodyPr>
-          <a:lstStyle/>
-          <a:p>
-            <a:pPr algn="l">
-              <a:lnSpc>
-                <a:spcPct val="105000"/>
-              </a:lnSpc>
-              <a:spcBef>
-                <a:spcPts val="0"/>
-              </a:spcBef>
-              <a:spcAft>
-                <a:spcPts val="600"/>
-              </a:spcAft>
-            </a:pPr>
-            <a:r>
-              <a:rPr sz="1350" b="1">
-                <a:solidFill>
-                  <a:srgbClr val="1B3A6B"/>
-                </a:solidFill>
-                <a:latin typeface="PingFang SC"/>
-                <a:ea typeface="PingFang SC"/>
-              </a:rPr>
-              <a:t>评测严谨性</a:t>
-            </a:r>
-          </a:p>
-        </p:txBody>
-      </p:sp>
-      <p:sp>
-        <p:nvSpPr>
-          <p:cNvPr id="13" name="TextBox 12"/>
-          <p:cNvSpPr txBox="1"/>
-          <p:nvPr/>
-        </p:nvSpPr>
-        <p:spPr>
-          <a:xfrm>
-            <a:off x="731520" y="5907024"/>
-            <a:ext cx="10881360" cy="640080"/>
-          </a:xfrm>
-          <a:prstGeom prst="rect">
-            <a:avLst/>
-          </a:prstGeom>
-          <a:noFill/>
-        </p:spPr>
-        <p:txBody>
-          <a:bodyPr wrap="square" anchor="t" lIns="25400" rIns="25400" tIns="12700" bIns="12700">
-            <a:spAutoFit/>
-          </a:bodyPr>
-          <a:lstStyle/>
-          <a:p>
-            <a:pPr algn="l">
-              <a:lnSpc>
-                <a:spcPct val="112000"/>
-              </a:lnSpc>
-              <a:spcBef>
-                <a:spcPts val="0"/>
-              </a:spcBef>
-              <a:spcAft>
-                <a:spcPts val="200"/>
-              </a:spcAft>
-            </a:pPr>
-            <a:r>
-              <a:rPr sz="1150" b="0">
-                <a:solidFill>
-                  <a:srgbClr val="1A1B1C"/>
-                </a:solidFill>
-                <a:latin typeface="PingFang SC"/>
-                <a:ea typeface="PingFang SC"/>
-              </a:rPr>
-              <a:t>· 金标准由 Crossref 实时构造（valid / not_found / mismatch）；伪造 DOI 用过去年份、同格式仅篡改后缀并实时验证 404，避免靠未来年份推断。</a:t>
-            </a:r>
-          </a:p>
-          <a:p>
-            <a:pPr algn="l">
-              <a:lnSpc>
-                <a:spcPct val="112000"/>
-              </a:lnSpc>
-              <a:spcBef>
-                <a:spcPts val="0"/>
-              </a:spcBef>
-              <a:spcAft>
-                <a:spcPts val="200"/>
-              </a:spcAft>
-            </a:pPr>
-            <a:r>
-              <a:rPr sz="1150" b="0">
-                <a:solidFill>
-                  <a:srgbClr val="1A1B1C"/>
-                </a:solidFill>
-                <a:latin typeface="PingFang SC"/>
-                <a:ea typeface="PingFang SC"/>
-              </a:rPr>
-              <a:t>· dev / test 分离，48 条 test 未参与调参；SSE 逐条重放审计证明离线基线全程零联网（工具请求被 blocked），对照公平。</a:t>
+              <a:t>· 专家流程差异在过程：平均工具调用更少、无长期记忆污染、JSON 稳定可解析；全流程留证据、可审计。局限：仅单模型、n=48，弱模型增益待验。</a:t>
             </a:r>
           </a:p>
         </p:txBody>

--- a/assets/科研论文核查员.pptx
+++ b/assets/科研论文核查员.pptx
@@ -8805,7 +8805,7 @@
                 <a:latin typeface="PingFang SC"/>
                 <a:ea typeface="PingFang SC"/>
               </a:rPr>
-              <a:t>· 一键复现：run_batch → export → audit</a:t>
+              <a:t>· 一键复现：run_batch + run_naive → export → audit</a:t>
             </a:r>
           </a:p>
           <a:p>
@@ -8828,7 +8828,7 @@
                 <a:latin typeface="PingFang SC"/>
                 <a:ea typeface="PingFang SC"/>
               </a:rPr>
-              <a:t>· 技术报告、逐条结果、SSE 审计报告、Layer-2 案例</a:t>
+              <a:t>· 三方对照技术报告、逐条结果、12 run SSE 审计、Layer-2 案例</a:t>
             </a:r>
           </a:p>
           <a:p>

--- a/assets/科研论文核查员.pptx
+++ b/assets/科研论文核查员.pptx
@@ -3927,7 +3927,7 @@
                 <a:latin typeface="PingFang SC"/>
                 <a:ea typeface="PingFang SC"/>
               </a:rPr>
-              <a:t>纯模型离线基线在 48 条金标准上的实测表现</a:t>
+              <a:t>这不是小概率问题，而是科研可信度的系统性风险；右侧为我们 48 条金标准的实测</a:t>
             </a:r>
           </a:p>
         </p:txBody>
@@ -4030,8 +4030,8 @@
         </p:nvSpPr>
         <p:spPr>
           <a:xfrm>
-            <a:off x="548640" y="1783080"/>
-            <a:ext cx="5486400" cy="4480560"/>
+            <a:off x="548640" y="1417320"/>
+            <a:ext cx="5486400" cy="3246120"/>
           </a:xfrm>
           <a:prstGeom prst="roundRect">
             <a:avLst>
@@ -4076,8 +4076,8 @@
         </p:nvSpPr>
         <p:spPr>
           <a:xfrm>
-            <a:off x="822960" y="1965960"/>
-            <a:ext cx="5029200" cy="411480"/>
+            <a:off x="822960" y="1536192"/>
+            <a:ext cx="5029200" cy="365760"/>
           </a:xfrm>
           <a:prstGeom prst="rect">
             <a:avLst/>
@@ -4102,7 +4102,7 @@
               </a:spcAft>
             </a:pPr>
             <a:r>
-              <a:rPr sz="1700" b="1">
+              <a:rPr sz="1600" b="1">
                 <a:solidFill>
                   <a:srgbClr val="1B3A6B"/>
                 </a:solidFill>
@@ -4122,7 +4122,7 @@
         </p:nvSpPr>
         <p:spPr>
           <a:xfrm>
-            <a:off x="841248" y="2542032"/>
+            <a:off x="841248" y="1993392"/>
             <a:ext cx="128016" cy="128016"/>
           </a:xfrm>
           <a:prstGeom prst="rect">
@@ -4166,8 +4166,8 @@
         </p:nvSpPr>
         <p:spPr>
           <a:xfrm>
-            <a:off x="1097280" y="2441448"/>
-            <a:ext cx="4709160" cy="868680"/>
+            <a:off x="1097280" y="1901952"/>
+            <a:ext cx="4754880" cy="658368"/>
           </a:xfrm>
           <a:prstGeom prst="rect">
             <a:avLst/>
@@ -4182,7 +4182,7 @@
           <a:p>
             <a:pPr algn="l">
               <a:lnSpc>
-                <a:spcPct val="108000"/>
+                <a:spcPct val="105000"/>
               </a:lnSpc>
               <a:spcBef>
                 <a:spcPts val="0"/>
@@ -4192,7 +4192,7 @@
               </a:spcAft>
             </a:pPr>
             <a:r>
-              <a:rPr sz="1400" b="1">
+              <a:rPr sz="1350" b="1">
                 <a:solidFill>
                   <a:srgbClr val="1A1B1C"/>
                 </a:solidFill>
@@ -4202,14 +4202,14 @@
               <a:t>编造 DOI　</a:t>
             </a:r>
             <a:r>
-              <a:rPr sz="1250" b="0">
+              <a:rPr sz="1200" b="0">
                 <a:solidFill>
                   <a:srgbClr val="5F6670"/>
                 </a:solidFill>
                 <a:latin typeface="PingFang SC"/>
                 <a:ea typeface="PingFang SC"/>
               </a:rPr>
-              <a:t>大模型撰写/审查文献时会“编造”参考文献，且 DOI 格式高度逼真，肉眼难辨。</a:t>
+              <a:t>大模型“编造”参考文献，DOI 格式逼真，肉眼难辨。</a:t>
             </a:r>
           </a:p>
         </p:txBody>
@@ -4222,7 +4222,7 @@
         </p:nvSpPr>
         <p:spPr>
           <a:xfrm>
-            <a:off x="841248" y="3474720"/>
+            <a:off x="841248" y="2670048"/>
             <a:ext cx="128016" cy="128016"/>
           </a:xfrm>
           <a:prstGeom prst="rect">
@@ -4266,8 +4266,8 @@
         </p:nvSpPr>
         <p:spPr>
           <a:xfrm>
-            <a:off x="1097280" y="3374136"/>
-            <a:ext cx="4709160" cy="868680"/>
+            <a:off x="1097280" y="2578608"/>
+            <a:ext cx="4754880" cy="658368"/>
           </a:xfrm>
           <a:prstGeom prst="rect">
             <a:avLst/>
@@ -4282,7 +4282,7 @@
           <a:p>
             <a:pPr algn="l">
               <a:lnSpc>
-                <a:spcPct val="108000"/>
+                <a:spcPct val="105000"/>
               </a:lnSpc>
               <a:spcBef>
                 <a:spcPts val="0"/>
@@ -4292,7 +4292,7 @@
               </a:spcAft>
             </a:pPr>
             <a:r>
-              <a:rPr sz="1400" b="1">
+              <a:rPr sz="1350" b="1">
                 <a:solidFill>
                   <a:srgbClr val="1A1B1C"/>
                 </a:solidFill>
@@ -4302,14 +4302,14 @@
               <a:t>题录错配　</a:t>
             </a:r>
             <a:r>
-              <a:rPr sz="1250" b="0">
+              <a:rPr sz="1200" b="0">
                 <a:solidFill>
                   <a:srgbClr val="5F6670"/>
                 </a:solidFill>
                 <a:latin typeface="PingFang SC"/>
                 <a:ea typeface="PingFang SC"/>
               </a:rPr>
-              <a:t>真实 DOI 配错作者、年份、期刊或卷期页，张冠李戴却看似规范。</a:t>
+              <a:t>真实 DOI 配错作者、年份、期刊或卷期页，张冠李戴。</a:t>
             </a:r>
           </a:p>
         </p:txBody>
@@ -4322,7 +4322,7 @@
         </p:nvSpPr>
         <p:spPr>
           <a:xfrm>
-            <a:off x="841248" y="4407407"/>
+            <a:off x="841248" y="3346704"/>
             <a:ext cx="128016" cy="128016"/>
           </a:xfrm>
           <a:prstGeom prst="rect">
@@ -4366,8 +4366,8 @@
         </p:nvSpPr>
         <p:spPr>
           <a:xfrm>
-            <a:off x="1097280" y="4306824"/>
-            <a:ext cx="4709160" cy="868680"/>
+            <a:off x="1097280" y="3255264"/>
+            <a:ext cx="4754880" cy="658368"/>
           </a:xfrm>
           <a:prstGeom prst="rect">
             <a:avLst/>
@@ -4382,7 +4382,7 @@
           <a:p>
             <a:pPr algn="l">
               <a:lnSpc>
-                <a:spcPct val="108000"/>
+                <a:spcPct val="105000"/>
               </a:lnSpc>
               <a:spcBef>
                 <a:spcPts val="0"/>
@@ -4392,7 +4392,7 @@
               </a:spcAft>
             </a:pPr>
             <a:r>
-              <a:rPr sz="1400" b="1">
+              <a:rPr sz="1350" b="1">
                 <a:solidFill>
                   <a:srgbClr val="1A1B1C"/>
                 </a:solidFill>
@@ -4402,7 +4402,7 @@
               <a:t>撤稿未披露　</a:t>
             </a:r>
             <a:r>
-              <a:rPr sz="1250" b="0">
+              <a:rPr sz="1200" b="0">
                 <a:solidFill>
                   <a:srgbClr val="5F6670"/>
                 </a:solidFill>
@@ -4422,7 +4422,7 @@
         </p:nvSpPr>
         <p:spPr>
           <a:xfrm>
-            <a:off x="841248" y="5340095"/>
+            <a:off x="841248" y="4023360"/>
             <a:ext cx="128016" cy="128016"/>
           </a:xfrm>
           <a:prstGeom prst="rect">
@@ -4466,8 +4466,8 @@
         </p:nvSpPr>
         <p:spPr>
           <a:xfrm>
-            <a:off x="1097280" y="5239512"/>
-            <a:ext cx="4709160" cy="868680"/>
+            <a:off x="1097280" y="3931920"/>
+            <a:ext cx="4754880" cy="658368"/>
           </a:xfrm>
           <a:prstGeom prst="rect">
             <a:avLst/>
@@ -4482,7 +4482,7 @@
           <a:p>
             <a:pPr algn="l">
               <a:lnSpc>
-                <a:spcPct val="108000"/>
+                <a:spcPct val="105000"/>
               </a:lnSpc>
               <a:spcBef>
                 <a:spcPts val="0"/>
@@ -4492,7 +4492,7 @@
               </a:spcAft>
             </a:pPr>
             <a:r>
-              <a:rPr sz="1400" b="1">
+              <a:rPr sz="1350" b="1">
                 <a:solidFill>
                   <a:srgbClr val="1A1B1C"/>
                 </a:solidFill>
@@ -4502,14 +4502,14 @@
               <a:t>人工成本高　</a:t>
             </a:r>
             <a:r>
-              <a:rPr sz="1250" b="0">
+              <a:rPr sz="1200" b="0">
                 <a:solidFill>
                   <a:srgbClr val="5F6670"/>
                 </a:solidFill>
                 <a:latin typeface="PingFang SC"/>
                 <a:ea typeface="PingFang SC"/>
               </a:rPr>
-              <a:t>逐条查库、核对、查撤稿极耗时，审稿与自查难以规模化。</a:t>
+              <a:t>逐条查库、核对、查撤稿极耗时，审稿难规模化。</a:t>
             </a:r>
           </a:p>
         </p:txBody>
@@ -4522,8 +4522,8 @@
         </p:nvSpPr>
         <p:spPr>
           <a:xfrm>
-            <a:off x="6309360" y="1783080"/>
-            <a:ext cx="5349240" cy="4480560"/>
+            <a:off x="6309360" y="1417320"/>
+            <a:ext cx="5349240" cy="3246120"/>
           </a:xfrm>
           <a:prstGeom prst="roundRect">
             <a:avLst>
@@ -4570,8 +4570,8 @@
         </p:nvSpPr>
         <p:spPr>
           <a:xfrm>
-            <a:off x="6583680" y="1965960"/>
-            <a:ext cx="4846320" cy="411480"/>
+            <a:off x="6583680" y="1536192"/>
+            <a:ext cx="4846320" cy="365760"/>
           </a:xfrm>
           <a:prstGeom prst="rect">
             <a:avLst/>
@@ -4596,14 +4596,14 @@
               </a:spcAft>
             </a:pPr>
             <a:r>
-              <a:rPr sz="1700" b="1">
+              <a:rPr sz="1600" b="1">
                 <a:solidFill>
                   <a:srgbClr val="1B3A6B"/>
                 </a:solidFill>
                 <a:latin typeface="PingFang SC"/>
                 <a:ea typeface="PingFang SC"/>
               </a:rPr>
-              <a:t>实测：纯模型只能猜“格式规律”</a:t>
+              <a:t>实测：纯模型只能猜“格式规律”（48 条）</a:t>
             </a:r>
           </a:p>
         </p:txBody>
@@ -4616,8 +4616,8 @@
         </p:nvSpPr>
         <p:spPr>
           <a:xfrm>
-            <a:off x="6583680" y="2542032"/>
-            <a:ext cx="1828800" cy="640080"/>
+            <a:off x="6583680" y="1965960"/>
+            <a:ext cx="1783080" cy="603504"/>
           </a:xfrm>
           <a:prstGeom prst="rect">
             <a:avLst/>
@@ -4642,7 +4642,7 @@
               </a:spcAft>
             </a:pPr>
             <a:r>
-              <a:rPr sz="3000" b="1">
+              <a:rPr sz="2600" b="1">
                 <a:solidFill>
                   <a:srgbClr val="C0392B"/>
                 </a:solidFill>
@@ -4662,8 +4662,8 @@
         </p:nvSpPr>
         <p:spPr>
           <a:xfrm>
-            <a:off x="8458200" y="2587751"/>
-            <a:ext cx="3017520" cy="777240"/>
+            <a:off x="8394192" y="1993391"/>
+            <a:ext cx="3154680" cy="658368"/>
           </a:xfrm>
           <a:prstGeom prst="rect">
             <a:avLst/>
@@ -4678,7 +4678,7 @@
           <a:p>
             <a:pPr algn="l">
               <a:lnSpc>
-                <a:spcPct val="110000"/>
+                <a:spcPct val="105000"/>
               </a:lnSpc>
               <a:spcBef>
                 <a:spcPts val="0"/>
@@ -4688,14 +4688,14 @@
               </a:spcAft>
             </a:pPr>
             <a:r>
-              <a:rPr sz="1250" b="0">
+              <a:rPr sz="1150" b="0">
                 <a:solidFill>
                   <a:srgbClr val="1A1B1C"/>
                 </a:solidFill>
                 <a:latin typeface="PingFang SC"/>
                 <a:ea typeface="PingFang SC"/>
               </a:rPr>
-              <a:t>幻觉 DOI 检测 F1 仅为 0.62，误报 8 次、漏报 3 次</a:t>
+              <a:t>幻觉 DOI 检测 F1 仅 0.62，误报 8 次、漏报 3 次</a:t>
             </a:r>
           </a:p>
         </p:txBody>
@@ -4708,8 +4708,8 @@
         </p:nvSpPr>
         <p:spPr>
           <a:xfrm>
-            <a:off x="6583680" y="3593591"/>
-            <a:ext cx="1828800" cy="640080"/>
+            <a:off x="6583680" y="2752344"/>
+            <a:ext cx="1783080" cy="603504"/>
           </a:xfrm>
           <a:prstGeom prst="rect">
             <a:avLst/>
@@ -4734,7 +4734,7 @@
               </a:spcAft>
             </a:pPr>
             <a:r>
-              <a:rPr sz="3000" b="1">
+              <a:rPr sz="2600" b="1">
                 <a:solidFill>
                   <a:srgbClr val="C0392B"/>
                 </a:solidFill>
@@ -4754,8 +4754,8 @@
         </p:nvSpPr>
         <p:spPr>
           <a:xfrm>
-            <a:off x="8458200" y="3639311"/>
-            <a:ext cx="3017520" cy="777240"/>
+            <a:off x="8394192" y="2779775"/>
+            <a:ext cx="3154680" cy="658368"/>
           </a:xfrm>
           <a:prstGeom prst="rect">
             <a:avLst/>
@@ -4770,7 +4770,7 @@
           <a:p>
             <a:pPr algn="l">
               <a:lnSpc>
-                <a:spcPct val="110000"/>
+                <a:spcPct val="105000"/>
               </a:lnSpc>
               <a:spcBef>
                 <a:spcPts val="0"/>
@@ -4780,7 +4780,7 @@
               </a:spcAft>
             </a:pPr>
             <a:r>
-              <a:rPr sz="1250" b="0">
+              <a:rPr sz="1150" b="0">
                 <a:solidFill>
                   <a:srgbClr val="1A1B1C"/>
                 </a:solidFill>
@@ -4800,8 +4800,8 @@
         </p:nvSpPr>
         <p:spPr>
           <a:xfrm>
-            <a:off x="6583680" y="4645152"/>
-            <a:ext cx="1828800" cy="640080"/>
+            <a:off x="6583680" y="3538727"/>
+            <a:ext cx="1783080" cy="603504"/>
           </a:xfrm>
           <a:prstGeom prst="rect">
             <a:avLst/>
@@ -4826,7 +4826,7 @@
               </a:spcAft>
             </a:pPr>
             <a:r>
-              <a:rPr sz="3000" b="1">
+              <a:rPr sz="2600" b="1">
                 <a:solidFill>
                   <a:srgbClr val="C0392B"/>
                 </a:solidFill>
@@ -4846,8 +4846,8 @@
         </p:nvSpPr>
         <p:spPr>
           <a:xfrm>
-            <a:off x="8458200" y="4690872"/>
-            <a:ext cx="3017520" cy="777240"/>
+            <a:off x="8394192" y="3566159"/>
+            <a:ext cx="3154680" cy="658368"/>
           </a:xfrm>
           <a:prstGeom prst="rect">
             <a:avLst/>
@@ -4862,7 +4862,7 @@
           <a:p>
             <a:pPr algn="l">
               <a:lnSpc>
-                <a:spcPct val="110000"/>
+                <a:spcPct val="105000"/>
               </a:lnSpc>
               <a:spcBef>
                 <a:spcPts val="0"/>
@@ -4872,7 +4872,7 @@
               </a:spcAft>
             </a:pPr>
             <a:r>
-              <a:rPr sz="1250" b="0">
+              <a:rPr sz="1150" b="0">
                 <a:solidFill>
                   <a:srgbClr val="1A1B1C"/>
                 </a:solidFill>
@@ -4892,8 +4892,8 @@
         </p:nvSpPr>
         <p:spPr>
           <a:xfrm>
-            <a:off x="6583680" y="5532120"/>
-            <a:ext cx="4800600" cy="566928"/>
+            <a:off x="6583680" y="4297680"/>
+            <a:ext cx="4800600" cy="310896"/>
           </a:xfrm>
           <a:prstGeom prst="roundRect">
             <a:avLst>
@@ -4938,8 +4938,8 @@
         </p:nvSpPr>
         <p:spPr>
           <a:xfrm>
-            <a:off x="6720840" y="5532120"/>
-            <a:ext cx="4572000" cy="566928"/>
+            <a:off x="6720840" y="4297680"/>
+            <a:ext cx="4572000" cy="310896"/>
           </a:xfrm>
           <a:prstGeom prst="rect">
             <a:avLst/>
@@ -4964,7 +4964,7 @@
               </a:spcAft>
             </a:pPr>
             <a:r>
-              <a:rPr sz="1250" b="1">
+              <a:rPr sz="1200" b="1">
                 <a:solidFill>
                   <a:srgbClr val="C0392B"/>
                 </a:solidFill>
@@ -4972,6 +4972,656 @@
                 <a:ea typeface="PingFang SC"/>
               </a:rPr>
               <a:t>结论：没有外部证据，模型无法可靠区分“真”与“逼真”</a:t>
+            </a:r>
+          </a:p>
+        </p:txBody>
+      </p:sp>
+      <p:sp>
+        <p:nvSpPr>
+          <p:cNvPr id="27" name="Rounded Rectangle 26"/>
+          <p:cNvSpPr/>
+          <p:nvPr/>
+        </p:nvSpPr>
+        <p:spPr>
+          <a:xfrm>
+            <a:off x="548640" y="4828032"/>
+            <a:ext cx="11109960" cy="1737360"/>
+          </a:xfrm>
+          <a:prstGeom prst="roundRect">
+            <a:avLst>
+              <a:gd name="adj" fmla="val 8000"/>
+            </a:avLst>
+          </a:prstGeom>
+          <a:solidFill>
+            <a:srgbClr val="EEF2F8"/>
+          </a:solidFill>
+          <a:ln>
+            <a:noFill/>
+          </a:ln>
+          <a:effectLst/>
+        </p:spPr>
+        <p:style>
+          <a:lnRef idx="1">
+            <a:schemeClr val="accent1"/>
+          </a:lnRef>
+          <a:fillRef idx="3">
+            <a:schemeClr val="accent1"/>
+          </a:fillRef>
+          <a:effectRef idx="2">
+            <a:schemeClr val="accent1"/>
+          </a:effectRef>
+          <a:fontRef idx="minor">
+            <a:schemeClr val="lt1"/>
+          </a:fontRef>
+        </p:style>
+        <p:txBody>
+          <a:bodyPr rtlCol="0" anchor="ctr"/>
+          <a:lstStyle/>
+          <a:p>
+            <a:pPr algn="ctr"/>
+          </a:p>
+        </p:txBody>
+      </p:sp>
+      <p:sp>
+        <p:nvSpPr>
+          <p:cNvPr id="28" name="TextBox 27"/>
+          <p:cNvSpPr txBox="1"/>
+          <p:nvPr/>
+        </p:nvSpPr>
+        <p:spPr>
+          <a:xfrm>
+            <a:off x="822960" y="4919472"/>
+            <a:ext cx="10607040" cy="310896"/>
+          </a:xfrm>
+          <a:prstGeom prst="rect">
+            <a:avLst/>
+          </a:prstGeom>
+          <a:noFill/>
+        </p:spPr>
+        <p:txBody>
+          <a:bodyPr wrap="square" anchor="t" lIns="25400" rIns="25400" tIns="12700" bIns="12700">
+            <a:spAutoFit/>
+          </a:bodyPr>
+          <a:lstStyle/>
+          <a:p>
+            <a:pPr algn="l">
+              <a:lnSpc>
+                <a:spcPct val="105000"/>
+              </a:lnSpc>
+              <a:spcBef>
+                <a:spcPts val="0"/>
+              </a:spcBef>
+              <a:spcAft>
+                <a:spcPts val="600"/>
+              </a:spcAft>
+            </a:pPr>
+            <a:r>
+              <a:rPr sz="1350" b="1">
+                <a:solidFill>
+                  <a:srgbClr val="1B3A6B"/>
+                </a:solidFill>
+                <a:latin typeface="PingFang SC"/>
+                <a:ea typeface="PingFang SC"/>
+              </a:rPr>
+              <a:t>问题的量级（公开文献，非自测）</a:t>
+            </a:r>
+          </a:p>
+        </p:txBody>
+      </p:sp>
+      <p:sp>
+        <p:nvSpPr>
+          <p:cNvPr id="29" name="Rounded Rectangle 28"/>
+          <p:cNvSpPr/>
+          <p:nvPr/>
+        </p:nvSpPr>
+        <p:spPr>
+          <a:xfrm>
+            <a:off x="713232" y="5285232"/>
+            <a:ext cx="3529584" cy="1188720"/>
+          </a:xfrm>
+          <a:prstGeom prst="roundRect">
+            <a:avLst>
+              <a:gd name="adj" fmla="val 8000"/>
+            </a:avLst>
+          </a:prstGeom>
+          <a:solidFill>
+            <a:srgbClr val="FFFFFF"/>
+          </a:solidFill>
+          <a:ln w="9525">
+            <a:solidFill>
+              <a:srgbClr val="D9DEE6"/>
+            </a:solidFill>
+          </a:ln>
+          <a:effectLst/>
+        </p:spPr>
+        <p:style>
+          <a:lnRef idx="1">
+            <a:schemeClr val="accent1"/>
+          </a:lnRef>
+          <a:fillRef idx="3">
+            <a:schemeClr val="accent1"/>
+          </a:fillRef>
+          <a:effectRef idx="2">
+            <a:schemeClr val="accent1"/>
+          </a:effectRef>
+          <a:fontRef idx="minor">
+            <a:schemeClr val="lt1"/>
+          </a:fontRef>
+        </p:style>
+        <p:txBody>
+          <a:bodyPr rtlCol="0" anchor="ctr"/>
+          <a:lstStyle/>
+          <a:p>
+            <a:pPr algn="ctr"/>
+          </a:p>
+        </p:txBody>
+      </p:sp>
+      <p:sp>
+        <p:nvSpPr>
+          <p:cNvPr id="30" name="TextBox 29"/>
+          <p:cNvSpPr txBox="1"/>
+          <p:nvPr/>
+        </p:nvSpPr>
+        <p:spPr>
+          <a:xfrm>
+            <a:off x="896112" y="5376672"/>
+            <a:ext cx="3200400" cy="457200"/>
+          </a:xfrm>
+          <a:prstGeom prst="rect">
+            <a:avLst/>
+          </a:prstGeom>
+          <a:noFill/>
+        </p:spPr>
+        <p:txBody>
+          <a:bodyPr wrap="square" anchor="ctr" lIns="25400" rIns="25400" tIns="12700" bIns="12700">
+            <a:spAutoFit/>
+          </a:bodyPr>
+          <a:lstStyle/>
+          <a:p>
+            <a:pPr algn="l">
+              <a:lnSpc>
+                <a:spcPct val="105000"/>
+              </a:lnSpc>
+              <a:spcBef>
+                <a:spcPts val="0"/>
+              </a:spcBef>
+              <a:spcAft>
+                <a:spcPts val="600"/>
+              </a:spcAft>
+            </a:pPr>
+            <a:r>
+              <a:rPr sz="2400" b="1">
+                <a:solidFill>
+                  <a:srgbClr val="C0392B"/>
+                </a:solidFill>
+                <a:latin typeface="PingFang SC"/>
+                <a:ea typeface="PingFang SC"/>
+              </a:rPr>
+              <a:t>&gt; 70%</a:t>
+            </a:r>
+          </a:p>
+        </p:txBody>
+      </p:sp>
+      <p:sp>
+        <p:nvSpPr>
+          <p:cNvPr id="31" name="TextBox 30"/>
+          <p:cNvSpPr txBox="1"/>
+          <p:nvPr/>
+        </p:nvSpPr>
+        <p:spPr>
+          <a:xfrm>
+            <a:off x="896112" y="5833872"/>
+            <a:ext cx="3200400" cy="457200"/>
+          </a:xfrm>
+          <a:prstGeom prst="rect">
+            <a:avLst/>
+          </a:prstGeom>
+          <a:noFill/>
+        </p:spPr>
+        <p:txBody>
+          <a:bodyPr wrap="square" anchor="t" lIns="25400" rIns="25400" tIns="12700" bIns="12700">
+            <a:spAutoFit/>
+          </a:bodyPr>
+          <a:lstStyle/>
+          <a:p>
+            <a:pPr algn="l">
+              <a:lnSpc>
+                <a:spcPct val="105000"/>
+              </a:lnSpc>
+              <a:spcBef>
+                <a:spcPts val="0"/>
+              </a:spcBef>
+              <a:spcAft>
+                <a:spcPts val="600"/>
+              </a:spcAft>
+            </a:pPr>
+            <a:r>
+              <a:rPr sz="1100" b="1">
+                <a:solidFill>
+                  <a:srgbClr val="1A1B1C"/>
+                </a:solidFill>
+                <a:latin typeface="PingFang SC"/>
+                <a:ea typeface="PingFang SC"/>
+              </a:rPr>
+              <a:t>受访研究者曾尝试却无法复现他人的实验</a:t>
+            </a:r>
+          </a:p>
+        </p:txBody>
+      </p:sp>
+      <p:sp>
+        <p:nvSpPr>
+          <p:cNvPr id="32" name="TextBox 31"/>
+          <p:cNvSpPr txBox="1"/>
+          <p:nvPr/>
+        </p:nvSpPr>
+        <p:spPr>
+          <a:xfrm>
+            <a:off x="896112" y="6236208"/>
+            <a:ext cx="3246120" cy="219456"/>
+          </a:xfrm>
+          <a:prstGeom prst="rect">
+            <a:avLst/>
+          </a:prstGeom>
+          <a:noFill/>
+        </p:spPr>
+        <p:txBody>
+          <a:bodyPr wrap="square" anchor="t" lIns="25400" rIns="25400" tIns="12700" bIns="12700">
+            <a:spAutoFit/>
+          </a:bodyPr>
+          <a:lstStyle/>
+          <a:p>
+            <a:pPr algn="l">
+              <a:lnSpc>
+                <a:spcPct val="105000"/>
+              </a:lnSpc>
+              <a:spcBef>
+                <a:spcPts val="0"/>
+              </a:spcBef>
+              <a:spcAft>
+                <a:spcPts val="600"/>
+              </a:spcAft>
+            </a:pPr>
+            <a:r>
+              <a:rPr sz="850" b="0">
+                <a:solidFill>
+                  <a:srgbClr val="5F6670"/>
+                </a:solidFill>
+                <a:latin typeface="PingFang SC"/>
+                <a:ea typeface="PingFang SC"/>
+              </a:rPr>
+              <a:t>Nature 2016  reproducibility survey, n=1576</a:t>
+            </a:r>
+          </a:p>
+        </p:txBody>
+      </p:sp>
+      <p:sp>
+        <p:nvSpPr>
+          <p:cNvPr id="33" name="Rounded Rectangle 32"/>
+          <p:cNvSpPr/>
+          <p:nvPr/>
+        </p:nvSpPr>
+        <p:spPr>
+          <a:xfrm>
+            <a:off x="4389120" y="5285232"/>
+            <a:ext cx="3529584" cy="1188720"/>
+          </a:xfrm>
+          <a:prstGeom prst="roundRect">
+            <a:avLst>
+              <a:gd name="adj" fmla="val 8000"/>
+            </a:avLst>
+          </a:prstGeom>
+          <a:solidFill>
+            <a:srgbClr val="FFFFFF"/>
+          </a:solidFill>
+          <a:ln w="9525">
+            <a:solidFill>
+              <a:srgbClr val="D9DEE6"/>
+            </a:solidFill>
+          </a:ln>
+          <a:effectLst/>
+        </p:spPr>
+        <p:style>
+          <a:lnRef idx="1">
+            <a:schemeClr val="accent1"/>
+          </a:lnRef>
+          <a:fillRef idx="3">
+            <a:schemeClr val="accent1"/>
+          </a:fillRef>
+          <a:effectRef idx="2">
+            <a:schemeClr val="accent1"/>
+          </a:effectRef>
+          <a:fontRef idx="minor">
+            <a:schemeClr val="lt1"/>
+          </a:fontRef>
+        </p:style>
+        <p:txBody>
+          <a:bodyPr rtlCol="0" anchor="ctr"/>
+          <a:lstStyle/>
+          <a:p>
+            <a:pPr algn="ctr"/>
+          </a:p>
+        </p:txBody>
+      </p:sp>
+      <p:sp>
+        <p:nvSpPr>
+          <p:cNvPr id="34" name="TextBox 33"/>
+          <p:cNvSpPr txBox="1"/>
+          <p:nvPr/>
+        </p:nvSpPr>
+        <p:spPr>
+          <a:xfrm>
+            <a:off x="4572000" y="5376672"/>
+            <a:ext cx="3200400" cy="457200"/>
+          </a:xfrm>
+          <a:prstGeom prst="rect">
+            <a:avLst/>
+          </a:prstGeom>
+          <a:noFill/>
+        </p:spPr>
+        <p:txBody>
+          <a:bodyPr wrap="square" anchor="ctr" lIns="25400" rIns="25400" tIns="12700" bIns="12700">
+            <a:spAutoFit/>
+          </a:bodyPr>
+          <a:lstStyle/>
+          <a:p>
+            <a:pPr algn="l">
+              <a:lnSpc>
+                <a:spcPct val="105000"/>
+              </a:lnSpc>
+              <a:spcBef>
+                <a:spcPts val="0"/>
+              </a:spcBef>
+              <a:spcAft>
+                <a:spcPts val="600"/>
+              </a:spcAft>
+            </a:pPr>
+            <a:r>
+              <a:rPr sz="2400" b="1">
+                <a:solidFill>
+                  <a:srgbClr val="C0392B"/>
+                </a:solidFill>
+                <a:latin typeface="PingFang SC"/>
+                <a:ea typeface="PingFang SC"/>
+              </a:rPr>
+              <a:t>1 万+</a:t>
+            </a:r>
+          </a:p>
+        </p:txBody>
+      </p:sp>
+      <p:sp>
+        <p:nvSpPr>
+          <p:cNvPr id="35" name="TextBox 34"/>
+          <p:cNvSpPr txBox="1"/>
+          <p:nvPr/>
+        </p:nvSpPr>
+        <p:spPr>
+          <a:xfrm>
+            <a:off x="4572000" y="5833872"/>
+            <a:ext cx="3200400" cy="457200"/>
+          </a:xfrm>
+          <a:prstGeom prst="rect">
+            <a:avLst/>
+          </a:prstGeom>
+          <a:noFill/>
+        </p:spPr>
+        <p:txBody>
+          <a:bodyPr wrap="square" anchor="t" lIns="25400" rIns="25400" tIns="12700" bIns="12700">
+            <a:spAutoFit/>
+          </a:bodyPr>
+          <a:lstStyle/>
+          <a:p>
+            <a:pPr algn="l">
+              <a:lnSpc>
+                <a:spcPct val="105000"/>
+              </a:lnSpc>
+              <a:spcBef>
+                <a:spcPts val="0"/>
+              </a:spcBef>
+              <a:spcAft>
+                <a:spcPts val="600"/>
+              </a:spcAft>
+            </a:pPr>
+            <a:r>
+              <a:rPr sz="1100" b="1">
+                <a:solidFill>
+                  <a:srgbClr val="1A1B1C"/>
+                </a:solidFill>
+                <a:latin typeface="PingFang SC"/>
+                <a:ea typeface="PingFang SC"/>
+              </a:rPr>
+              <a:t>2023 年撤稿论文数创历史纪录，撤稿库累计约 5.5 万条</a:t>
+            </a:r>
+          </a:p>
+        </p:txBody>
+      </p:sp>
+      <p:sp>
+        <p:nvSpPr>
+          <p:cNvPr id="36" name="TextBox 35"/>
+          <p:cNvSpPr txBox="1"/>
+          <p:nvPr/>
+        </p:nvSpPr>
+        <p:spPr>
+          <a:xfrm>
+            <a:off x="4572000" y="6236208"/>
+            <a:ext cx="3246120" cy="219456"/>
+          </a:xfrm>
+          <a:prstGeom prst="rect">
+            <a:avLst/>
+          </a:prstGeom>
+          <a:noFill/>
+        </p:spPr>
+        <p:txBody>
+          <a:bodyPr wrap="square" anchor="t" lIns="25400" rIns="25400" tIns="12700" bIns="12700">
+            <a:spAutoFit/>
+          </a:bodyPr>
+          <a:lstStyle/>
+          <a:p>
+            <a:pPr algn="l">
+              <a:lnSpc>
+                <a:spcPct val="105000"/>
+              </a:lnSpc>
+              <a:spcBef>
+                <a:spcPts val="0"/>
+              </a:spcBef>
+              <a:spcAft>
+                <a:spcPts val="600"/>
+              </a:spcAft>
+            </a:pPr>
+            <a:r>
+              <a:rPr sz="850" b="0">
+                <a:solidFill>
+                  <a:srgbClr val="5F6670"/>
+                </a:solidFill>
+                <a:latin typeface="PingFang SC"/>
+                <a:ea typeface="PingFang SC"/>
+              </a:rPr>
+              <a:t>Nature 2023；Retraction Watch / Crossref</a:t>
+            </a:r>
+          </a:p>
+        </p:txBody>
+      </p:sp>
+      <p:sp>
+        <p:nvSpPr>
+          <p:cNvPr id="37" name="Rounded Rectangle 36"/>
+          <p:cNvSpPr/>
+          <p:nvPr/>
+        </p:nvSpPr>
+        <p:spPr>
+          <a:xfrm>
+            <a:off x="8065007" y="5285232"/>
+            <a:ext cx="3529584" cy="1188720"/>
+          </a:xfrm>
+          <a:prstGeom prst="roundRect">
+            <a:avLst>
+              <a:gd name="adj" fmla="val 8000"/>
+            </a:avLst>
+          </a:prstGeom>
+          <a:solidFill>
+            <a:srgbClr val="FFFFFF"/>
+          </a:solidFill>
+          <a:ln w="9525">
+            <a:solidFill>
+              <a:srgbClr val="D9DEE6"/>
+            </a:solidFill>
+          </a:ln>
+          <a:effectLst/>
+        </p:spPr>
+        <p:style>
+          <a:lnRef idx="1">
+            <a:schemeClr val="accent1"/>
+          </a:lnRef>
+          <a:fillRef idx="3">
+            <a:schemeClr val="accent1"/>
+          </a:fillRef>
+          <a:effectRef idx="2">
+            <a:schemeClr val="accent1"/>
+          </a:effectRef>
+          <a:fontRef idx="minor">
+            <a:schemeClr val="lt1"/>
+          </a:fontRef>
+        </p:style>
+        <p:txBody>
+          <a:bodyPr rtlCol="0" anchor="ctr"/>
+          <a:lstStyle/>
+          <a:p>
+            <a:pPr algn="ctr"/>
+          </a:p>
+        </p:txBody>
+      </p:sp>
+      <p:sp>
+        <p:nvSpPr>
+          <p:cNvPr id="38" name="TextBox 37"/>
+          <p:cNvSpPr txBox="1"/>
+          <p:nvPr/>
+        </p:nvSpPr>
+        <p:spPr>
+          <a:xfrm>
+            <a:off x="8247887" y="5376672"/>
+            <a:ext cx="3200400" cy="457200"/>
+          </a:xfrm>
+          <a:prstGeom prst="rect">
+            <a:avLst/>
+          </a:prstGeom>
+          <a:noFill/>
+        </p:spPr>
+        <p:txBody>
+          <a:bodyPr wrap="square" anchor="ctr" lIns="25400" rIns="25400" tIns="12700" bIns="12700">
+            <a:spAutoFit/>
+          </a:bodyPr>
+          <a:lstStyle/>
+          <a:p>
+            <a:pPr algn="l">
+              <a:lnSpc>
+                <a:spcPct val="105000"/>
+              </a:lnSpc>
+              <a:spcBef>
+                <a:spcPts val="0"/>
+              </a:spcBef>
+              <a:spcAft>
+                <a:spcPts val="600"/>
+              </a:spcAft>
+            </a:pPr>
+            <a:r>
+              <a:rPr sz="2400" b="1">
+                <a:solidFill>
+                  <a:srgbClr val="C0392B"/>
+                </a:solidFill>
+                <a:latin typeface="PingFang SC"/>
+                <a:ea typeface="PingFang SC"/>
+              </a:rPr>
+              <a:t>18%</a:t>
+            </a:r>
+          </a:p>
+        </p:txBody>
+      </p:sp>
+      <p:sp>
+        <p:nvSpPr>
+          <p:cNvPr id="39" name="TextBox 38"/>
+          <p:cNvSpPr txBox="1"/>
+          <p:nvPr/>
+        </p:nvSpPr>
+        <p:spPr>
+          <a:xfrm>
+            <a:off x="8247887" y="5833872"/>
+            <a:ext cx="3200400" cy="457200"/>
+          </a:xfrm>
+          <a:prstGeom prst="rect">
+            <a:avLst/>
+          </a:prstGeom>
+          <a:noFill/>
+        </p:spPr>
+        <p:txBody>
+          <a:bodyPr wrap="square" anchor="t" lIns="25400" rIns="25400" tIns="12700" bIns="12700">
+            <a:spAutoFit/>
+          </a:bodyPr>
+          <a:lstStyle/>
+          <a:p>
+            <a:pPr algn="l">
+              <a:lnSpc>
+                <a:spcPct val="105000"/>
+              </a:lnSpc>
+              <a:spcBef>
+                <a:spcPts val="0"/>
+              </a:spcBef>
+              <a:spcAft>
+                <a:spcPts val="600"/>
+              </a:spcAft>
+            </a:pPr>
+            <a:r>
+              <a:rPr sz="1100" b="1">
+                <a:solidFill>
+                  <a:srgbClr val="1A1B1C"/>
+                </a:solidFill>
+                <a:latin typeface="PingFang SC"/>
+                <a:ea typeface="PingFang SC"/>
+              </a:rPr>
+              <a:t>GPT-4 生成的引用为编造，另有 24% 真实引用有实质错误</a:t>
+            </a:r>
+          </a:p>
+        </p:txBody>
+      </p:sp>
+      <p:sp>
+        <p:nvSpPr>
+          <p:cNvPr id="40" name="TextBox 39"/>
+          <p:cNvSpPr txBox="1"/>
+          <p:nvPr/>
+        </p:nvSpPr>
+        <p:spPr>
+          <a:xfrm>
+            <a:off x="8247887" y="6236208"/>
+            <a:ext cx="3246120" cy="219456"/>
+          </a:xfrm>
+          <a:prstGeom prst="rect">
+            <a:avLst/>
+          </a:prstGeom>
+          <a:noFill/>
+        </p:spPr>
+        <p:txBody>
+          <a:bodyPr wrap="square" anchor="t" lIns="25400" rIns="25400" tIns="12700" bIns="12700">
+            <a:spAutoFit/>
+          </a:bodyPr>
+          <a:lstStyle/>
+          <a:p>
+            <a:pPr algn="l">
+              <a:lnSpc>
+                <a:spcPct val="105000"/>
+              </a:lnSpc>
+              <a:spcBef>
+                <a:spcPts val="0"/>
+              </a:spcBef>
+              <a:spcAft>
+                <a:spcPts val="600"/>
+              </a:spcAft>
+            </a:pPr>
+            <a:r>
+              <a:rPr sz="850" b="0">
+                <a:solidFill>
+                  <a:srgbClr val="5F6670"/>
+                </a:solidFill>
+                <a:latin typeface="PingFang SC"/>
+                <a:ea typeface="PingFang SC"/>
+              </a:rPr>
+              <a:t>Sci Rep 2023;13:14045</a:t>
             </a:r>
           </a:p>
         </p:txBody>
@@ -6831,7 +7481,7 @@
                 <a:latin typeface="PingFang SC"/>
                 <a:ea typeface="PingFang SC"/>
               </a:rPr>
-              <a:t>结果：联网是决定性闸门（F1 0.62→1.0），专家流程固化确定性</a:t>
+              <a:t>两个主结果：联网是能力闸门，流程固化确定性护栏</a:t>
             </a:r>
           </a:p>
         </p:txBody>
@@ -6972,9 +7622,101 @@
           </a:p>
         </p:txBody>
       </p:sp>
+      <p:sp>
+        <p:nvSpPr>
+          <p:cNvPr id="7" name="Rounded Rectangle 6"/>
+          <p:cNvSpPr/>
+          <p:nvPr/>
+        </p:nvSpPr>
+        <p:spPr>
+          <a:xfrm>
+            <a:off x="502920" y="1463040"/>
+            <a:ext cx="5074920" cy="329184"/>
+          </a:xfrm>
+          <a:prstGeom prst="roundRect">
+            <a:avLst>
+              <a:gd name="adj" fmla="val 8000"/>
+            </a:avLst>
+          </a:prstGeom>
+          <a:solidFill>
+            <a:srgbClr val="1B3A6B"/>
+          </a:solidFill>
+          <a:ln>
+            <a:noFill/>
+          </a:ln>
+          <a:effectLst/>
+        </p:spPr>
+        <p:style>
+          <a:lnRef idx="1">
+            <a:schemeClr val="accent1"/>
+          </a:lnRef>
+          <a:fillRef idx="3">
+            <a:schemeClr val="accent1"/>
+          </a:fillRef>
+          <a:effectRef idx="2">
+            <a:schemeClr val="accent1"/>
+          </a:effectRef>
+          <a:fontRef idx="minor">
+            <a:schemeClr val="lt1"/>
+          </a:fontRef>
+        </p:style>
+        <p:txBody>
+          <a:bodyPr rtlCol="0" anchor="ctr"/>
+          <a:lstStyle/>
+          <a:p>
+            <a:pPr algn="ctr"/>
+          </a:p>
+        </p:txBody>
+      </p:sp>
+      <p:sp>
+        <p:nvSpPr>
+          <p:cNvPr id="8" name="TextBox 7"/>
+          <p:cNvSpPr txBox="1"/>
+          <p:nvPr/>
+        </p:nvSpPr>
+        <p:spPr>
+          <a:xfrm>
+            <a:off x="502920" y="1463040"/>
+            <a:ext cx="5074920" cy="329184"/>
+          </a:xfrm>
+          <a:prstGeom prst="rect">
+            <a:avLst/>
+          </a:prstGeom>
+          <a:noFill/>
+        </p:spPr>
+        <p:txBody>
+          <a:bodyPr wrap="square" anchor="ctr" lIns="25400" rIns="25400" tIns="12700" bIns="12700">
+            <a:spAutoFit/>
+          </a:bodyPr>
+          <a:lstStyle/>
+          <a:p>
+            <a:pPr algn="ctr">
+              <a:lnSpc>
+                <a:spcPct val="105000"/>
+              </a:lnSpc>
+              <a:spcBef>
+                <a:spcPts val="0"/>
+              </a:spcBef>
+              <a:spcAft>
+                <a:spcPts val="600"/>
+              </a:spcAft>
+            </a:pPr>
+            <a:r>
+              <a:rPr sz="1250" b="1">
+                <a:solidFill>
+                  <a:srgbClr val="FFFFFF"/>
+                </a:solidFill>
+                <a:latin typeface="PingFang SC"/>
+                <a:ea typeface="PingFang SC"/>
+              </a:rPr>
+              <a:t>主结果① 能力闸门：一联网，F1 0.62→1.0、误报 23→0</a:t>
+            </a:r>
+          </a:p>
+        </p:txBody>
+      </p:sp>
       <p:pic>
         <p:nvPicPr>
-          <p:cNvPr id="7" name="Picture 6" descr="ppt_f1_compare.png"/>
+          <p:cNvPr id="9" name="Picture 8" descr="ppt_f1_compare.png"/>
           <p:cNvPicPr>
             <a:picLocks noChangeAspect="1"/>
           </p:cNvPicPr>
@@ -6988,444 +7730,24 @@
         </p:blipFill>
         <p:spPr>
           <a:xfrm>
-            <a:off x="502920" y="1828800"/>
-            <a:ext cx="5029200" cy="3297836"/>
+            <a:off x="548640" y="1874519"/>
+            <a:ext cx="4983480" cy="3267856"/>
           </a:xfrm>
           <a:prstGeom prst="rect">
             <a:avLst/>
           </a:prstGeom>
         </p:spPr>
       </p:pic>
-      <p:graphicFrame>
-        <p:nvGraphicFramePr>
-          <p:cNvPr id="8" name="Table 7"/>
-          <p:cNvGraphicFramePr>
-            <a:graphicFrameLocks noGrp="1"/>
-          </p:cNvGraphicFramePr>
-          <p:nvPr/>
-        </p:nvGraphicFramePr>
-        <p:xfrm>
-          <a:off x="6720840" y="1920240"/>
-          <a:ext cx="4937760" cy="2286000"/>
-        </p:xfrm>
-        <a:graphic>
-          <a:graphicData uri="http://schemas.openxmlformats.org/drawingml/2006/table">
-            <a:tbl>
-              <a:tblPr firstRow="1" bandRow="1">
-                <a:tableStyleId>{5C22544A-7EE6-4342-B048-85BDC9FD1C3A}</a:tableStyleId>
-              </a:tblPr>
-              <a:tblGrid>
-                <a:gridCol w="1481328"/>
-                <a:gridCol w="1152144"/>
-                <a:gridCol w="1152144"/>
-                <a:gridCol w="1152144"/>
-              </a:tblGrid>
-              <a:tr h="571500">
-                <a:tc>
-                  <a:txBody>
-                    <a:bodyPr/>
-                    <a:lstStyle/>
-                    <a:p>
-                      <a:pPr algn="l"/>
-                      <a:r>
-                        <a:rPr sz="1250" b="1">
-                          <a:solidFill>
-                            <a:srgbClr val="FFFFFF"/>
-                          </a:solidFill>
-                          <a:latin typeface="PingFang SC"/>
-                          <a:ea typeface="PingFang SC"/>
-                        </a:rPr>
-                        <a:t>检测任务</a:t>
-                      </a:r>
-                    </a:p>
-                  </a:txBody>
-                  <a:tcPr anchor="ctr">
-                    <a:solidFill>
-                      <a:srgbClr val="1B3A6B"/>
-                    </a:solidFill>
-                  </a:tcPr>
-                </a:tc>
-                <a:tc>
-                  <a:txBody>
-                    <a:bodyPr/>
-                    <a:lstStyle/>
-                    <a:p>
-                      <a:pPr algn="ctr"/>
-                      <a:r>
-                        <a:rPr sz="1250" b="1">
-                          <a:solidFill>
-                            <a:srgbClr val="FFFFFF"/>
-                          </a:solidFill>
-                          <a:latin typeface="PingFang SC"/>
-                          <a:ea typeface="PingFang SC"/>
-                        </a:rPr>
-                        <a:t>离线基线</a:t>
-                      </a:r>
-                    </a:p>
-                  </a:txBody>
-                  <a:tcPr anchor="ctr">
-                    <a:solidFill>
-                      <a:srgbClr val="1B3A6B"/>
-                    </a:solidFill>
-                  </a:tcPr>
-                </a:tc>
-                <a:tc>
-                  <a:txBody>
-                    <a:bodyPr/>
-                    <a:lstStyle/>
-                    <a:p>
-                      <a:pPr algn="ctr"/>
-                      <a:r>
-                        <a:rPr sz="1250" b="1">
-                          <a:solidFill>
-                            <a:srgbClr val="FFFFFF"/>
-                          </a:solidFill>
-                          <a:latin typeface="PingFang SC"/>
-                          <a:ea typeface="PingFang SC"/>
-                        </a:rPr>
-                        <a:t>普通联网</a:t>
-                      </a:r>
-                    </a:p>
-                  </a:txBody>
-                  <a:tcPr anchor="ctr">
-                    <a:solidFill>
-                      <a:srgbClr val="1B3A6B"/>
-                    </a:solidFill>
-                  </a:tcPr>
-                </a:tc>
-                <a:tc>
-                  <a:txBody>
-                    <a:bodyPr/>
-                    <a:lstStyle/>
-                    <a:p>
-                      <a:pPr algn="ctr"/>
-                      <a:r>
-                        <a:rPr sz="1250" b="1">
-                          <a:solidFill>
-                            <a:srgbClr val="FFFFFF"/>
-                          </a:solidFill>
-                          <a:latin typeface="PingFang SC"/>
-                          <a:ea typeface="PingFang SC"/>
-                        </a:rPr>
-                        <a:t>专家工作流</a:t>
-                      </a:r>
-                    </a:p>
-                  </a:txBody>
-                  <a:tcPr anchor="ctr">
-                    <a:solidFill>
-                      <a:srgbClr val="1B3A6B"/>
-                    </a:solidFill>
-                  </a:tcPr>
-                </a:tc>
-              </a:tr>
-              <a:tr h="571500">
-                <a:tc>
-                  <a:txBody>
-                    <a:bodyPr/>
-                    <a:lstStyle/>
-                    <a:p>
-                      <a:pPr algn="l"/>
-                      <a:r>
-                        <a:rPr sz="1400" b="0">
-                          <a:solidFill>
-                            <a:srgbClr val="1A1B1C"/>
-                          </a:solidFill>
-                          <a:latin typeface="PingFang SC"/>
-                          <a:ea typeface="PingFang SC"/>
-                        </a:rPr>
-                        <a:t>幻觉 DOI</a:t>
-                      </a:r>
-                    </a:p>
-                  </a:txBody>
-                  <a:tcPr anchor="ctr">
-                    <a:solidFill>
-                      <a:srgbClr val="F4F6F9"/>
-                    </a:solidFill>
-                  </a:tcPr>
-                </a:tc>
-                <a:tc>
-                  <a:txBody>
-                    <a:bodyPr/>
-                    <a:lstStyle/>
-                    <a:p>
-                      <a:pPr algn="ctr"/>
-                      <a:r>
-                        <a:rPr sz="1400" b="1">
-                          <a:solidFill>
-                            <a:srgbClr val="C0392B"/>
-                          </a:solidFill>
-                          <a:latin typeface="PingFang SC"/>
-                          <a:ea typeface="PingFang SC"/>
-                        </a:rPr>
-                        <a:t>0.62</a:t>
-                      </a:r>
-                    </a:p>
-                  </a:txBody>
-                  <a:tcPr anchor="ctr">
-                    <a:solidFill>
-                      <a:srgbClr val="F4F6F9"/>
-                    </a:solidFill>
-                  </a:tcPr>
-                </a:tc>
-                <a:tc>
-                  <a:txBody>
-                    <a:bodyPr/>
-                    <a:lstStyle/>
-                    <a:p>
-                      <a:pPr algn="ctr"/>
-                      <a:r>
-                        <a:rPr sz="1400" b="1">
-                          <a:solidFill>
-                            <a:srgbClr val="4F6B9A"/>
-                          </a:solidFill>
-                          <a:latin typeface="PingFang SC"/>
-                          <a:ea typeface="PingFang SC"/>
-                        </a:rPr>
-                        <a:t>1.00</a:t>
-                      </a:r>
-                    </a:p>
-                  </a:txBody>
-                  <a:tcPr anchor="ctr">
-                    <a:solidFill>
-                      <a:srgbClr val="F4F6F9"/>
-                    </a:solidFill>
-                  </a:tcPr>
-                </a:tc>
-                <a:tc>
-                  <a:txBody>
-                    <a:bodyPr/>
-                    <a:lstStyle/>
-                    <a:p>
-                      <a:pPr algn="ctr"/>
-                      <a:r>
-                        <a:rPr sz="1400" b="1">
-                          <a:solidFill>
-                            <a:srgbClr val="2E8B57"/>
-                          </a:solidFill>
-                          <a:latin typeface="PingFang SC"/>
-                          <a:ea typeface="PingFang SC"/>
-                        </a:rPr>
-                        <a:t>1.00</a:t>
-                      </a:r>
-                    </a:p>
-                  </a:txBody>
-                  <a:tcPr anchor="ctr">
-                    <a:solidFill>
-                      <a:srgbClr val="F4F6F9"/>
-                    </a:solidFill>
-                  </a:tcPr>
-                </a:tc>
-              </a:tr>
-              <a:tr h="571500">
-                <a:tc>
-                  <a:txBody>
-                    <a:bodyPr/>
-                    <a:lstStyle/>
-                    <a:p>
-                      <a:pPr algn="l"/>
-                      <a:r>
-                        <a:rPr sz="1400" b="0">
-                          <a:solidFill>
-                            <a:srgbClr val="1A1B1C"/>
-                          </a:solidFill>
-                          <a:latin typeface="PingFang SC"/>
-                          <a:ea typeface="PingFang SC"/>
-                        </a:rPr>
-                        <a:t>题录错配</a:t>
-                      </a:r>
-                    </a:p>
-                  </a:txBody>
-                  <a:tcPr anchor="ctr">
-                    <a:solidFill>
-                      <a:srgbClr val="FFFFFF"/>
-                    </a:solidFill>
-                  </a:tcPr>
-                </a:tc>
-                <a:tc>
-                  <a:txBody>
-                    <a:bodyPr/>
-                    <a:lstStyle/>
-                    <a:p>
-                      <a:pPr algn="ctr"/>
-                      <a:r>
-                        <a:rPr sz="1400" b="1">
-                          <a:solidFill>
-                            <a:srgbClr val="C0392B"/>
-                          </a:solidFill>
-                          <a:latin typeface="PingFang SC"/>
-                          <a:ea typeface="PingFang SC"/>
-                        </a:rPr>
-                        <a:t>0.82</a:t>
-                      </a:r>
-                    </a:p>
-                  </a:txBody>
-                  <a:tcPr anchor="ctr">
-                    <a:solidFill>
-                      <a:srgbClr val="FFFFFF"/>
-                    </a:solidFill>
-                  </a:tcPr>
-                </a:tc>
-                <a:tc>
-                  <a:txBody>
-                    <a:bodyPr/>
-                    <a:lstStyle/>
-                    <a:p>
-                      <a:pPr algn="ctr"/>
-                      <a:r>
-                        <a:rPr sz="1400" b="1">
-                          <a:solidFill>
-                            <a:srgbClr val="4F6B9A"/>
-                          </a:solidFill>
-                          <a:latin typeface="PingFang SC"/>
-                          <a:ea typeface="PingFang SC"/>
-                        </a:rPr>
-                        <a:t>1.00</a:t>
-                      </a:r>
-                    </a:p>
-                  </a:txBody>
-                  <a:tcPr anchor="ctr">
-                    <a:solidFill>
-                      <a:srgbClr val="FFFFFF"/>
-                    </a:solidFill>
-                  </a:tcPr>
-                </a:tc>
-                <a:tc>
-                  <a:txBody>
-                    <a:bodyPr/>
-                    <a:lstStyle/>
-                    <a:p>
-                      <a:pPr algn="ctr"/>
-                      <a:r>
-                        <a:rPr sz="1400" b="1">
-                          <a:solidFill>
-                            <a:srgbClr val="2E8B57"/>
-                          </a:solidFill>
-                          <a:latin typeface="PingFang SC"/>
-                          <a:ea typeface="PingFang SC"/>
-                        </a:rPr>
-                        <a:t>1.00</a:t>
-                      </a:r>
-                    </a:p>
-                  </a:txBody>
-                  <a:tcPr anchor="ctr">
-                    <a:solidFill>
-                      <a:srgbClr val="FFFFFF"/>
-                    </a:solidFill>
-                  </a:tcPr>
-                </a:tc>
-              </a:tr>
-              <a:tr h="571500">
-                <a:tc>
-                  <a:txBody>
-                    <a:bodyPr/>
-                    <a:lstStyle/>
-                    <a:p>
-                      <a:pPr algn="l"/>
-                      <a:r>
-                        <a:rPr sz="1400" b="0">
-                          <a:solidFill>
-                            <a:srgbClr val="1A1B1C"/>
-                          </a:solidFill>
-                          <a:latin typeface="PingFang SC"/>
-                          <a:ea typeface="PingFang SC"/>
-                        </a:rPr>
-                        <a:t>任意问题</a:t>
-                      </a:r>
-                    </a:p>
-                  </a:txBody>
-                  <a:tcPr anchor="ctr">
-                    <a:solidFill>
-                      <a:srgbClr val="F4F6F9"/>
-                    </a:solidFill>
-                  </a:tcPr>
-                </a:tc>
-                <a:tc>
-                  <a:txBody>
-                    <a:bodyPr/>
-                    <a:lstStyle/>
-                    <a:p>
-                      <a:pPr algn="ctr"/>
-                      <a:r>
-                        <a:rPr sz="1400" b="1">
-                          <a:solidFill>
-                            <a:srgbClr val="C0392B"/>
-                          </a:solidFill>
-                          <a:latin typeface="PingFang SC"/>
-                          <a:ea typeface="PingFang SC"/>
-                        </a:rPr>
-                        <a:t>0.82</a:t>
-                      </a:r>
-                    </a:p>
-                  </a:txBody>
-                  <a:tcPr anchor="ctr">
-                    <a:solidFill>
-                      <a:srgbClr val="F4F6F9"/>
-                    </a:solidFill>
-                  </a:tcPr>
-                </a:tc>
-                <a:tc>
-                  <a:txBody>
-                    <a:bodyPr/>
-                    <a:lstStyle/>
-                    <a:p>
-                      <a:pPr algn="ctr"/>
-                      <a:r>
-                        <a:rPr sz="1400" b="1">
-                          <a:solidFill>
-                            <a:srgbClr val="4F6B9A"/>
-                          </a:solidFill>
-                          <a:latin typeface="PingFang SC"/>
-                          <a:ea typeface="PingFang SC"/>
-                        </a:rPr>
-                        <a:t>1.00</a:t>
-                      </a:r>
-                    </a:p>
-                  </a:txBody>
-                  <a:tcPr anchor="ctr">
-                    <a:solidFill>
-                      <a:srgbClr val="F4F6F9"/>
-                    </a:solidFill>
-                  </a:tcPr>
-                </a:tc>
-                <a:tc>
-                  <a:txBody>
-                    <a:bodyPr/>
-                    <a:lstStyle/>
-                    <a:p>
-                      <a:pPr algn="ctr"/>
-                      <a:r>
-                        <a:rPr sz="1400" b="1">
-                          <a:solidFill>
-                            <a:srgbClr val="2E8B57"/>
-                          </a:solidFill>
-                          <a:latin typeface="PingFang SC"/>
-                          <a:ea typeface="PingFang SC"/>
-                        </a:rPr>
-                        <a:t>1.00</a:t>
-                      </a:r>
-                    </a:p>
-                  </a:txBody>
-                  <a:tcPr anchor="ctr">
-                    <a:solidFill>
-                      <a:srgbClr val="F4F6F9"/>
-                    </a:solidFill>
-                  </a:tcPr>
-                </a:tc>
-              </a:tr>
-            </a:tbl>
-          </a:graphicData>
-        </a:graphic>
-      </p:graphicFrame>
-      <p:sp>
-        <p:nvSpPr>
-          <p:cNvPr id="9" name="Rounded Rectangle 8"/>
+      <p:sp>
+        <p:nvSpPr>
+          <p:cNvPr id="10" name="Rounded Rectangle 9"/>
           <p:cNvSpPr/>
           <p:nvPr/>
         </p:nvSpPr>
         <p:spPr>
           <a:xfrm>
-            <a:off x="6720840" y="4526280"/>
-            <a:ext cx="4937760" cy="1078992"/>
+            <a:off x="5806440" y="1463040"/>
+            <a:ext cx="5897880" cy="329184"/>
           </a:xfrm>
           <a:prstGeom prst="roundRect">
             <a:avLst>
@@ -7433,7 +7755,7 @@
             </a:avLst>
           </a:prstGeom>
           <a:solidFill>
-            <a:srgbClr val="ECF4EF"/>
+            <a:srgbClr val="2E8B57"/>
           </a:solidFill>
           <a:ln>
             <a:noFill/>
@@ -7464,14 +7786,14 @@
       </p:sp>
       <p:sp>
         <p:nvSpPr>
-          <p:cNvPr id="10" name="TextBox 9"/>
+          <p:cNvPr id="11" name="TextBox 10"/>
           <p:cNvSpPr txBox="1"/>
           <p:nvPr/>
         </p:nvSpPr>
         <p:spPr>
           <a:xfrm>
-            <a:off x="6949440" y="4553712"/>
-            <a:ext cx="4572000" cy="1042415"/>
+            <a:off x="5806440" y="1463040"/>
+            <a:ext cx="5897880" cy="329184"/>
           </a:xfrm>
           <a:prstGeom prst="rect">
             <a:avLst/>
@@ -7484,86 +7806,40 @@
           </a:bodyPr>
           <a:lstStyle/>
           <a:p>
-            <a:pPr algn="l">
-              <a:lnSpc>
-                <a:spcPct val="112000"/>
-              </a:lnSpc>
-              <a:spcBef>
-                <a:spcPts val="0"/>
-              </a:spcBef>
-              <a:spcAft>
-                <a:spcPts val="200"/>
-              </a:spcAft>
-            </a:pPr>
-            <a:r>
-              <a:rPr sz="1350" b="1">
-                <a:solidFill>
-                  <a:srgbClr val="2E8B57"/>
-                </a:solidFill>
-                <a:latin typeface="PingFang SC"/>
-                <a:ea typeface="PingFang SC"/>
-              </a:rPr>
-              <a:t>两个联网方法均 0 误报 / 0 漏报</a:t>
-            </a:r>
-          </a:p>
-          <a:p>
-            <a:pPr algn="l">
-              <a:lnSpc>
-                <a:spcPct val="112000"/>
-              </a:lnSpc>
-              <a:spcBef>
-                <a:spcPts val="0"/>
-              </a:spcBef>
-              <a:spcAft>
-                <a:spcPts val="200"/>
-              </a:spcAft>
-            </a:pPr>
-            <a:r>
-              <a:rPr sz="1200" b="1">
-                <a:solidFill>
-                  <a:srgbClr val="C0392B"/>
-                </a:solidFill>
-                <a:latin typeface="PingFang SC"/>
-                <a:ea typeface="PingFang SC"/>
-              </a:rPr>
-              <a:t>离线基线：合计 23 次误报、7 次漏报</a:t>
-            </a:r>
-          </a:p>
-          <a:p>
-            <a:pPr algn="l">
-              <a:lnSpc>
-                <a:spcPct val="112000"/>
-              </a:lnSpc>
-              <a:spcBef>
-                <a:spcPts val="0"/>
-              </a:spcBef>
-              <a:spcAft>
-                <a:spcPts val="200"/>
-              </a:spcAft>
-            </a:pPr>
-            <a:r>
-              <a:rPr sz="1100" b="1">
-                <a:solidFill>
-                  <a:srgbClr val="1B3A6B"/>
-                </a:solidFill>
-                <a:latin typeface="PingFang SC"/>
-                <a:ea typeface="PingFang SC"/>
-              </a:rPr>
-              <a:t>强模型上专家流程无额外 F1 增益，价值在确定性</a:t>
-            </a:r>
-          </a:p>
-        </p:txBody>
-      </p:sp>
-      <p:sp>
-        <p:nvSpPr>
-          <p:cNvPr id="11" name="Rounded Rectangle 10"/>
+            <a:pPr algn="ctr">
+              <a:lnSpc>
+                <a:spcPct val="105000"/>
+              </a:lnSpc>
+              <a:spcBef>
+                <a:spcPts val="0"/>
+              </a:spcBef>
+              <a:spcAft>
+                <a:spcPts val="600"/>
+              </a:spcAft>
+            </a:pPr>
+            <a:r>
+              <a:rPr sz="1250" b="1">
+                <a:solidFill>
+                  <a:srgbClr val="FFFFFF"/>
+                </a:solidFill>
+                <a:latin typeface="PingFang SC"/>
+                <a:ea typeface="PingFang SC"/>
+              </a:rPr>
+              <a:t>主结果② 确定性护栏：专家流程相对普通 Agent 的真实增益</a:t>
+            </a:r>
+          </a:p>
+        </p:txBody>
+      </p:sp>
+      <p:sp>
+        <p:nvSpPr>
+          <p:cNvPr id="12" name="Rounded Rectangle 11"/>
           <p:cNvSpPr/>
           <p:nvPr/>
         </p:nvSpPr>
         <p:spPr>
           <a:xfrm>
-            <a:off x="502920" y="5806440"/>
-            <a:ext cx="11155680" cy="914400"/>
+            <a:off x="5806440" y="1901952"/>
+            <a:ext cx="5897880" cy="850392"/>
           </a:xfrm>
           <a:prstGeom prst="roundRect">
             <a:avLst>
@@ -7602,14 +7878,1478 @@
       </p:sp>
       <p:sp>
         <p:nvSpPr>
-          <p:cNvPr id="12" name="TextBox 11"/>
+          <p:cNvPr id="13" name="Rectangle 12"/>
+          <p:cNvSpPr/>
+          <p:nvPr/>
+        </p:nvSpPr>
+        <p:spPr>
+          <a:xfrm>
+            <a:off x="5806440" y="1901952"/>
+            <a:ext cx="73152" cy="850392"/>
+          </a:xfrm>
+          <a:prstGeom prst="rect">
+            <a:avLst/>
+          </a:prstGeom>
+          <a:solidFill>
+            <a:srgbClr val="2E8B57"/>
+          </a:solidFill>
+          <a:ln>
+            <a:noFill/>
+          </a:ln>
+          <a:effectLst/>
+        </p:spPr>
+        <p:style>
+          <a:lnRef idx="1">
+            <a:schemeClr val="accent1"/>
+          </a:lnRef>
+          <a:fillRef idx="3">
+            <a:schemeClr val="accent1"/>
+          </a:fillRef>
+          <a:effectRef idx="2">
+            <a:schemeClr val="accent1"/>
+          </a:effectRef>
+          <a:fontRef idx="minor">
+            <a:schemeClr val="lt1"/>
+          </a:fontRef>
+        </p:style>
+        <p:txBody>
+          <a:bodyPr rtlCol="0" anchor="ctr"/>
+          <a:lstStyle/>
+          <a:p>
+            <a:pPr algn="ctr"/>
+          </a:p>
+        </p:txBody>
+      </p:sp>
+      <p:sp>
+        <p:nvSpPr>
+          <p:cNvPr id="14" name="TextBox 13"/>
           <p:cNvSpPr txBox="1"/>
           <p:nvPr/>
         </p:nvSpPr>
         <p:spPr>
           <a:xfrm>
-            <a:off x="731520" y="5870448"/>
-            <a:ext cx="10972800" cy="274320"/>
+            <a:off x="6016752" y="1993392"/>
+            <a:ext cx="2788920" cy="329184"/>
+          </a:xfrm>
+          <a:prstGeom prst="rect">
+            <a:avLst/>
+          </a:prstGeom>
+          <a:noFill/>
+        </p:spPr>
+        <p:txBody>
+          <a:bodyPr wrap="square" anchor="ctr" lIns="25400" rIns="25400" tIns="12700" bIns="12700">
+            <a:spAutoFit/>
+          </a:bodyPr>
+          <a:lstStyle/>
+          <a:p>
+            <a:pPr algn="l">
+              <a:lnSpc>
+                <a:spcPct val="105000"/>
+              </a:lnSpc>
+              <a:spcBef>
+                <a:spcPts val="0"/>
+              </a:spcBef>
+              <a:spcAft>
+                <a:spcPts val="600"/>
+              </a:spcAft>
+            </a:pPr>
+            <a:r>
+              <a:rPr sz="1250" b="1">
+                <a:solidFill>
+                  <a:srgbClr val="1B3A6B"/>
+                </a:solidFill>
+                <a:latin typeface="PingFang SC"/>
+                <a:ea typeface="PingFang SC"/>
+              </a:rPr>
+              <a:t>平均工具调用 / 轮</a:t>
+            </a:r>
+          </a:p>
+        </p:txBody>
+      </p:sp>
+      <p:sp>
+        <p:nvSpPr>
+          <p:cNvPr id="15" name="TextBox 14"/>
+          <p:cNvSpPr txBox="1"/>
+          <p:nvPr/>
+        </p:nvSpPr>
+        <p:spPr>
+          <a:xfrm>
+            <a:off x="6016752" y="2359152"/>
+            <a:ext cx="2834640" cy="347472"/>
+          </a:xfrm>
+          <a:prstGeom prst="rect">
+            <a:avLst/>
+          </a:prstGeom>
+          <a:noFill/>
+        </p:spPr>
+        <p:txBody>
+          <a:bodyPr wrap="square" anchor="ctr" lIns="25400" rIns="25400" tIns="12700" bIns="12700">
+            <a:spAutoFit/>
+          </a:bodyPr>
+          <a:lstStyle/>
+          <a:p>
+            <a:pPr algn="l">
+              <a:lnSpc>
+                <a:spcPct val="100000"/>
+              </a:lnSpc>
+              <a:spcBef>
+                <a:spcPts val="0"/>
+              </a:spcBef>
+              <a:spcAft>
+                <a:spcPts val="600"/>
+              </a:spcAft>
+            </a:pPr>
+            <a:r>
+              <a:rPr sz="950" b="0">
+                <a:solidFill>
+                  <a:srgbClr val="5F6670"/>
+                </a:solidFill>
+                <a:latin typeface="PingFang SC"/>
+                <a:ea typeface="PingFang SC"/>
+              </a:rPr>
+              <a:t>路径更短、token 更省（7 轮均值）</a:t>
+            </a:r>
+          </a:p>
+        </p:txBody>
+      </p:sp>
+      <p:sp>
+        <p:nvSpPr>
+          <p:cNvPr id="16" name="TextBox 15"/>
+          <p:cNvSpPr txBox="1"/>
+          <p:nvPr/>
+        </p:nvSpPr>
+        <p:spPr>
+          <a:xfrm>
+            <a:off x="8869680" y="2020824"/>
+            <a:ext cx="502920" cy="292608"/>
+          </a:xfrm>
+          <a:prstGeom prst="rect">
+            <a:avLst/>
+          </a:prstGeom>
+          <a:noFill/>
+        </p:spPr>
+        <p:txBody>
+          <a:bodyPr wrap="square" anchor="ctr" lIns="25400" rIns="25400" tIns="12700" bIns="12700">
+            <a:spAutoFit/>
+          </a:bodyPr>
+          <a:lstStyle/>
+          <a:p>
+            <a:pPr algn="l">
+              <a:lnSpc>
+                <a:spcPct val="105000"/>
+              </a:lnSpc>
+              <a:spcBef>
+                <a:spcPts val="0"/>
+              </a:spcBef>
+              <a:spcAft>
+                <a:spcPts val="600"/>
+              </a:spcAft>
+            </a:pPr>
+            <a:r>
+              <a:rPr sz="1100" b="0">
+                <a:solidFill>
+                  <a:srgbClr val="5F6670"/>
+                </a:solidFill>
+                <a:latin typeface="PingFang SC"/>
+                <a:ea typeface="PingFang SC"/>
+              </a:rPr>
+              <a:t>专家</a:t>
+            </a:r>
+          </a:p>
+        </p:txBody>
+      </p:sp>
+      <p:sp>
+        <p:nvSpPr>
+          <p:cNvPr id="17" name="TextBox 16"/>
+          <p:cNvSpPr txBox="1"/>
+          <p:nvPr/>
+        </p:nvSpPr>
+        <p:spPr>
+          <a:xfrm>
+            <a:off x="9418320" y="1975104"/>
+            <a:ext cx="2240280" cy="347472"/>
+          </a:xfrm>
+          <a:prstGeom prst="rect">
+            <a:avLst/>
+          </a:prstGeom>
+          <a:noFill/>
+        </p:spPr>
+        <p:txBody>
+          <a:bodyPr wrap="square" anchor="ctr" lIns="25400" rIns="25400" tIns="12700" bIns="12700">
+            <a:spAutoFit/>
+          </a:bodyPr>
+          <a:lstStyle/>
+          <a:p>
+            <a:pPr algn="l">
+              <a:lnSpc>
+                <a:spcPct val="105000"/>
+              </a:lnSpc>
+              <a:spcBef>
+                <a:spcPts val="0"/>
+              </a:spcBef>
+              <a:spcAft>
+                <a:spcPts val="600"/>
+              </a:spcAft>
+            </a:pPr>
+            <a:r>
+              <a:rPr sz="1350" b="1">
+                <a:solidFill>
+                  <a:srgbClr val="2E8B57"/>
+                </a:solidFill>
+                <a:latin typeface="PingFang SC"/>
+                <a:ea typeface="PingFang SC"/>
+              </a:rPr>
+              <a:t>8.3</a:t>
+            </a:r>
+          </a:p>
+        </p:txBody>
+      </p:sp>
+      <p:sp>
+        <p:nvSpPr>
+          <p:cNvPr id="18" name="TextBox 17"/>
+          <p:cNvSpPr txBox="1"/>
+          <p:nvPr/>
+        </p:nvSpPr>
+        <p:spPr>
+          <a:xfrm>
+            <a:off x="8869680" y="2386584"/>
+            <a:ext cx="502920" cy="292608"/>
+          </a:xfrm>
+          <a:prstGeom prst="rect">
+            <a:avLst/>
+          </a:prstGeom>
+          <a:noFill/>
+        </p:spPr>
+        <p:txBody>
+          <a:bodyPr wrap="square" anchor="ctr" lIns="25400" rIns="25400" tIns="12700" bIns="12700">
+            <a:spAutoFit/>
+          </a:bodyPr>
+          <a:lstStyle/>
+          <a:p>
+            <a:pPr algn="l">
+              <a:lnSpc>
+                <a:spcPct val="105000"/>
+              </a:lnSpc>
+              <a:spcBef>
+                <a:spcPts val="0"/>
+              </a:spcBef>
+              <a:spcAft>
+                <a:spcPts val="600"/>
+              </a:spcAft>
+            </a:pPr>
+            <a:r>
+              <a:rPr sz="1100" b="0">
+                <a:solidFill>
+                  <a:srgbClr val="5F6670"/>
+                </a:solidFill>
+                <a:latin typeface="PingFang SC"/>
+                <a:ea typeface="PingFang SC"/>
+              </a:rPr>
+              <a:t>普通</a:t>
+            </a:r>
+          </a:p>
+        </p:txBody>
+      </p:sp>
+      <p:sp>
+        <p:nvSpPr>
+          <p:cNvPr id="19" name="TextBox 18"/>
+          <p:cNvSpPr txBox="1"/>
+          <p:nvPr/>
+        </p:nvSpPr>
+        <p:spPr>
+          <a:xfrm>
+            <a:off x="9418320" y="2340864"/>
+            <a:ext cx="2240280" cy="347472"/>
+          </a:xfrm>
+          <a:prstGeom prst="rect">
+            <a:avLst/>
+          </a:prstGeom>
+          <a:noFill/>
+        </p:spPr>
+        <p:txBody>
+          <a:bodyPr wrap="square" anchor="ctr" lIns="25400" rIns="25400" tIns="12700" bIns="12700">
+            <a:spAutoFit/>
+          </a:bodyPr>
+          <a:lstStyle/>
+          <a:p>
+            <a:pPr algn="l">
+              <a:lnSpc>
+                <a:spcPct val="105000"/>
+              </a:lnSpc>
+              <a:spcBef>
+                <a:spcPts val="0"/>
+              </a:spcBef>
+              <a:spcAft>
+                <a:spcPts val="600"/>
+              </a:spcAft>
+            </a:pPr>
+            <a:r>
+              <a:rPr sz="1350" b="1">
+                <a:solidFill>
+                  <a:srgbClr val="4F6B9A"/>
+                </a:solidFill>
+                <a:latin typeface="PingFang SC"/>
+                <a:ea typeface="PingFang SC"/>
+              </a:rPr>
+              <a:t>12.4</a:t>
+            </a:r>
+          </a:p>
+        </p:txBody>
+      </p:sp>
+      <p:sp>
+        <p:nvSpPr>
+          <p:cNvPr id="20" name="Rounded Rectangle 19"/>
+          <p:cNvSpPr/>
+          <p:nvPr/>
+        </p:nvSpPr>
+        <p:spPr>
+          <a:xfrm>
+            <a:off x="5806440" y="2834640"/>
+            <a:ext cx="5897880" cy="850392"/>
+          </a:xfrm>
+          <a:prstGeom prst="roundRect">
+            <a:avLst>
+              <a:gd name="adj" fmla="val 8000"/>
+            </a:avLst>
+          </a:prstGeom>
+          <a:solidFill>
+            <a:srgbClr val="F4F6F9"/>
+          </a:solidFill>
+          <a:ln>
+            <a:noFill/>
+          </a:ln>
+          <a:effectLst/>
+        </p:spPr>
+        <p:style>
+          <a:lnRef idx="1">
+            <a:schemeClr val="accent1"/>
+          </a:lnRef>
+          <a:fillRef idx="3">
+            <a:schemeClr val="accent1"/>
+          </a:fillRef>
+          <a:effectRef idx="2">
+            <a:schemeClr val="accent1"/>
+          </a:effectRef>
+          <a:fontRef idx="minor">
+            <a:schemeClr val="lt1"/>
+          </a:fontRef>
+        </p:style>
+        <p:txBody>
+          <a:bodyPr rtlCol="0" anchor="ctr"/>
+          <a:lstStyle/>
+          <a:p>
+            <a:pPr algn="ctr"/>
+          </a:p>
+        </p:txBody>
+      </p:sp>
+      <p:sp>
+        <p:nvSpPr>
+          <p:cNvPr id="21" name="Rectangle 20"/>
+          <p:cNvSpPr/>
+          <p:nvPr/>
+        </p:nvSpPr>
+        <p:spPr>
+          <a:xfrm>
+            <a:off x="5806440" y="2834640"/>
+            <a:ext cx="73152" cy="850392"/>
+          </a:xfrm>
+          <a:prstGeom prst="rect">
+            <a:avLst/>
+          </a:prstGeom>
+          <a:solidFill>
+            <a:srgbClr val="2E8B57"/>
+          </a:solidFill>
+          <a:ln>
+            <a:noFill/>
+          </a:ln>
+          <a:effectLst/>
+        </p:spPr>
+        <p:style>
+          <a:lnRef idx="1">
+            <a:schemeClr val="accent1"/>
+          </a:lnRef>
+          <a:fillRef idx="3">
+            <a:schemeClr val="accent1"/>
+          </a:fillRef>
+          <a:effectRef idx="2">
+            <a:schemeClr val="accent1"/>
+          </a:effectRef>
+          <a:fontRef idx="minor">
+            <a:schemeClr val="lt1"/>
+          </a:fontRef>
+        </p:style>
+        <p:txBody>
+          <a:bodyPr rtlCol="0" anchor="ctr"/>
+          <a:lstStyle/>
+          <a:p>
+            <a:pPr algn="ctr"/>
+          </a:p>
+        </p:txBody>
+      </p:sp>
+      <p:sp>
+        <p:nvSpPr>
+          <p:cNvPr id="22" name="TextBox 21"/>
+          <p:cNvSpPr txBox="1"/>
+          <p:nvPr/>
+        </p:nvSpPr>
+        <p:spPr>
+          <a:xfrm>
+            <a:off x="6016752" y="2926080"/>
+            <a:ext cx="2788920" cy="329184"/>
+          </a:xfrm>
+          <a:prstGeom prst="rect">
+            <a:avLst/>
+          </a:prstGeom>
+          <a:noFill/>
+        </p:spPr>
+        <p:txBody>
+          <a:bodyPr wrap="square" anchor="ctr" lIns="25400" rIns="25400" tIns="12700" bIns="12700">
+            <a:spAutoFit/>
+          </a:bodyPr>
+          <a:lstStyle/>
+          <a:p>
+            <a:pPr algn="l">
+              <a:lnSpc>
+                <a:spcPct val="105000"/>
+              </a:lnSpc>
+              <a:spcBef>
+                <a:spcPts val="0"/>
+              </a:spcBef>
+              <a:spcAft>
+                <a:spcPts val="600"/>
+              </a:spcAft>
+            </a:pPr>
+            <a:r>
+              <a:rPr sz="1250" b="1">
+                <a:solidFill>
+                  <a:srgbClr val="1B3A6B"/>
+                </a:solidFill>
+                <a:latin typeface="PingFang SC"/>
+                <a:ea typeface="PingFang SC"/>
+              </a:rPr>
+              <a:t>违禁写入长期记忆</a:t>
+            </a:r>
+          </a:p>
+        </p:txBody>
+      </p:sp>
+      <p:sp>
+        <p:nvSpPr>
+          <p:cNvPr id="23" name="TextBox 22"/>
+          <p:cNvSpPr txBox="1"/>
+          <p:nvPr/>
+        </p:nvSpPr>
+        <p:spPr>
+          <a:xfrm>
+            <a:off x="6016752" y="3291840"/>
+            <a:ext cx="2834640" cy="347472"/>
+          </a:xfrm>
+          <a:prstGeom prst="rect">
+            <a:avLst/>
+          </a:prstGeom>
+          <a:noFill/>
+        </p:spPr>
+        <p:txBody>
+          <a:bodyPr wrap="square" anchor="ctr" lIns="25400" rIns="25400" tIns="12700" bIns="12700">
+            <a:spAutoFit/>
+          </a:bodyPr>
+          <a:lstStyle/>
+          <a:p>
+            <a:pPr algn="l">
+              <a:lnSpc>
+                <a:spcPct val="100000"/>
+              </a:lnSpc>
+              <a:spcBef>
+                <a:spcPts val="0"/>
+              </a:spcBef>
+              <a:spcAft>
+                <a:spcPts val="600"/>
+              </a:spcAft>
+            </a:pPr>
+            <a:r>
+              <a:rPr sz="950" b="0">
+                <a:solidFill>
+                  <a:srgbClr val="5F6670"/>
+                </a:solidFill>
+                <a:latin typeface="PingFang SC"/>
+                <a:ea typeface="PingFang SC"/>
+              </a:rPr>
+              <a:t>普通 Agent 被禁仍调用 save_memory</a:t>
+            </a:r>
+          </a:p>
+        </p:txBody>
+      </p:sp>
+      <p:sp>
+        <p:nvSpPr>
+          <p:cNvPr id="24" name="TextBox 23"/>
+          <p:cNvSpPr txBox="1"/>
+          <p:nvPr/>
+        </p:nvSpPr>
+        <p:spPr>
+          <a:xfrm>
+            <a:off x="8869680" y="2953512"/>
+            <a:ext cx="502920" cy="292608"/>
+          </a:xfrm>
+          <a:prstGeom prst="rect">
+            <a:avLst/>
+          </a:prstGeom>
+          <a:noFill/>
+        </p:spPr>
+        <p:txBody>
+          <a:bodyPr wrap="square" anchor="ctr" lIns="25400" rIns="25400" tIns="12700" bIns="12700">
+            <a:spAutoFit/>
+          </a:bodyPr>
+          <a:lstStyle/>
+          <a:p>
+            <a:pPr algn="l">
+              <a:lnSpc>
+                <a:spcPct val="105000"/>
+              </a:lnSpc>
+              <a:spcBef>
+                <a:spcPts val="0"/>
+              </a:spcBef>
+              <a:spcAft>
+                <a:spcPts val="600"/>
+              </a:spcAft>
+            </a:pPr>
+            <a:r>
+              <a:rPr sz="1100" b="0">
+                <a:solidFill>
+                  <a:srgbClr val="5F6670"/>
+                </a:solidFill>
+                <a:latin typeface="PingFang SC"/>
+                <a:ea typeface="PingFang SC"/>
+              </a:rPr>
+              <a:t>专家</a:t>
+            </a:r>
+          </a:p>
+        </p:txBody>
+      </p:sp>
+      <p:sp>
+        <p:nvSpPr>
+          <p:cNvPr id="25" name="TextBox 24"/>
+          <p:cNvSpPr txBox="1"/>
+          <p:nvPr/>
+        </p:nvSpPr>
+        <p:spPr>
+          <a:xfrm>
+            <a:off x="9418320" y="2907792"/>
+            <a:ext cx="2240280" cy="347472"/>
+          </a:xfrm>
+          <a:prstGeom prst="rect">
+            <a:avLst/>
+          </a:prstGeom>
+          <a:noFill/>
+        </p:spPr>
+        <p:txBody>
+          <a:bodyPr wrap="square" anchor="ctr" lIns="25400" rIns="25400" tIns="12700" bIns="12700">
+            <a:spAutoFit/>
+          </a:bodyPr>
+          <a:lstStyle/>
+          <a:p>
+            <a:pPr algn="l">
+              <a:lnSpc>
+                <a:spcPct val="105000"/>
+              </a:lnSpc>
+              <a:spcBef>
+                <a:spcPts val="0"/>
+              </a:spcBef>
+              <a:spcAft>
+                <a:spcPts val="600"/>
+              </a:spcAft>
+            </a:pPr>
+            <a:r>
+              <a:rPr sz="1350" b="1">
+                <a:solidFill>
+                  <a:srgbClr val="2E8B57"/>
+                </a:solidFill>
+                <a:latin typeface="PingFang SC"/>
+                <a:ea typeface="PingFang SC"/>
+              </a:rPr>
+              <a:t>0 次</a:t>
+            </a:r>
+          </a:p>
+        </p:txBody>
+      </p:sp>
+      <p:sp>
+        <p:nvSpPr>
+          <p:cNvPr id="26" name="TextBox 25"/>
+          <p:cNvSpPr txBox="1"/>
+          <p:nvPr/>
+        </p:nvSpPr>
+        <p:spPr>
+          <a:xfrm>
+            <a:off x="8869680" y="3319272"/>
+            <a:ext cx="502920" cy="292608"/>
+          </a:xfrm>
+          <a:prstGeom prst="rect">
+            <a:avLst/>
+          </a:prstGeom>
+          <a:noFill/>
+        </p:spPr>
+        <p:txBody>
+          <a:bodyPr wrap="square" anchor="ctr" lIns="25400" rIns="25400" tIns="12700" bIns="12700">
+            <a:spAutoFit/>
+          </a:bodyPr>
+          <a:lstStyle/>
+          <a:p>
+            <a:pPr algn="l">
+              <a:lnSpc>
+                <a:spcPct val="105000"/>
+              </a:lnSpc>
+              <a:spcBef>
+                <a:spcPts val="0"/>
+              </a:spcBef>
+              <a:spcAft>
+                <a:spcPts val="600"/>
+              </a:spcAft>
+            </a:pPr>
+            <a:r>
+              <a:rPr sz="1100" b="0">
+                <a:solidFill>
+                  <a:srgbClr val="5F6670"/>
+                </a:solidFill>
+                <a:latin typeface="PingFang SC"/>
+                <a:ea typeface="PingFang SC"/>
+              </a:rPr>
+              <a:t>普通</a:t>
+            </a:r>
+          </a:p>
+        </p:txBody>
+      </p:sp>
+      <p:sp>
+        <p:nvSpPr>
+          <p:cNvPr id="27" name="TextBox 26"/>
+          <p:cNvSpPr txBox="1"/>
+          <p:nvPr/>
+        </p:nvSpPr>
+        <p:spPr>
+          <a:xfrm>
+            <a:off x="9418320" y="3273552"/>
+            <a:ext cx="2240280" cy="347472"/>
+          </a:xfrm>
+          <a:prstGeom prst="rect">
+            <a:avLst/>
+          </a:prstGeom>
+          <a:noFill/>
+        </p:spPr>
+        <p:txBody>
+          <a:bodyPr wrap="square" anchor="ctr" lIns="25400" rIns="25400" tIns="12700" bIns="12700">
+            <a:spAutoFit/>
+          </a:bodyPr>
+          <a:lstStyle/>
+          <a:p>
+            <a:pPr algn="l">
+              <a:lnSpc>
+                <a:spcPct val="105000"/>
+              </a:lnSpc>
+              <a:spcBef>
+                <a:spcPts val="0"/>
+              </a:spcBef>
+              <a:spcAft>
+                <a:spcPts val="600"/>
+              </a:spcAft>
+            </a:pPr>
+            <a:r>
+              <a:rPr sz="1350" b="1">
+                <a:solidFill>
+                  <a:srgbClr val="4F6B9A"/>
+                </a:solidFill>
+                <a:latin typeface="PingFang SC"/>
+                <a:ea typeface="PingFang SC"/>
+              </a:rPr>
+              <a:t>1 次</a:t>
+            </a:r>
+          </a:p>
+        </p:txBody>
+      </p:sp>
+      <p:sp>
+        <p:nvSpPr>
+          <p:cNvPr id="28" name="Rounded Rectangle 27"/>
+          <p:cNvSpPr/>
+          <p:nvPr/>
+        </p:nvSpPr>
+        <p:spPr>
+          <a:xfrm>
+            <a:off x="5806440" y="3767328"/>
+            <a:ext cx="5897880" cy="850392"/>
+          </a:xfrm>
+          <a:prstGeom prst="roundRect">
+            <a:avLst>
+              <a:gd name="adj" fmla="val 8000"/>
+            </a:avLst>
+          </a:prstGeom>
+          <a:solidFill>
+            <a:srgbClr val="F4F6F9"/>
+          </a:solidFill>
+          <a:ln>
+            <a:noFill/>
+          </a:ln>
+          <a:effectLst/>
+        </p:spPr>
+        <p:style>
+          <a:lnRef idx="1">
+            <a:schemeClr val="accent1"/>
+          </a:lnRef>
+          <a:fillRef idx="3">
+            <a:schemeClr val="accent1"/>
+          </a:fillRef>
+          <a:effectRef idx="2">
+            <a:schemeClr val="accent1"/>
+          </a:effectRef>
+          <a:fontRef idx="minor">
+            <a:schemeClr val="lt1"/>
+          </a:fontRef>
+        </p:style>
+        <p:txBody>
+          <a:bodyPr rtlCol="0" anchor="ctr"/>
+          <a:lstStyle/>
+          <a:p>
+            <a:pPr algn="ctr"/>
+          </a:p>
+        </p:txBody>
+      </p:sp>
+      <p:sp>
+        <p:nvSpPr>
+          <p:cNvPr id="29" name="Rectangle 28"/>
+          <p:cNvSpPr/>
+          <p:nvPr/>
+        </p:nvSpPr>
+        <p:spPr>
+          <a:xfrm>
+            <a:off x="5806440" y="3767328"/>
+            <a:ext cx="73152" cy="850392"/>
+          </a:xfrm>
+          <a:prstGeom prst="rect">
+            <a:avLst/>
+          </a:prstGeom>
+          <a:solidFill>
+            <a:srgbClr val="2E8B57"/>
+          </a:solidFill>
+          <a:ln>
+            <a:noFill/>
+          </a:ln>
+          <a:effectLst/>
+        </p:spPr>
+        <p:style>
+          <a:lnRef idx="1">
+            <a:schemeClr val="accent1"/>
+          </a:lnRef>
+          <a:fillRef idx="3">
+            <a:schemeClr val="accent1"/>
+          </a:fillRef>
+          <a:effectRef idx="2">
+            <a:schemeClr val="accent1"/>
+          </a:effectRef>
+          <a:fontRef idx="minor">
+            <a:schemeClr val="lt1"/>
+          </a:fontRef>
+        </p:style>
+        <p:txBody>
+          <a:bodyPr rtlCol="0" anchor="ctr"/>
+          <a:lstStyle/>
+          <a:p>
+            <a:pPr algn="ctr"/>
+          </a:p>
+        </p:txBody>
+      </p:sp>
+      <p:sp>
+        <p:nvSpPr>
+          <p:cNvPr id="30" name="TextBox 29"/>
+          <p:cNvSpPr txBox="1"/>
+          <p:nvPr/>
+        </p:nvSpPr>
+        <p:spPr>
+          <a:xfrm>
+            <a:off x="6016752" y="3858768"/>
+            <a:ext cx="2788920" cy="329184"/>
+          </a:xfrm>
+          <a:prstGeom prst="rect">
+            <a:avLst/>
+          </a:prstGeom>
+          <a:noFill/>
+        </p:spPr>
+        <p:txBody>
+          <a:bodyPr wrap="square" anchor="ctr" lIns="25400" rIns="25400" tIns="12700" bIns="12700">
+            <a:spAutoFit/>
+          </a:bodyPr>
+          <a:lstStyle/>
+          <a:p>
+            <a:pPr algn="l">
+              <a:lnSpc>
+                <a:spcPct val="105000"/>
+              </a:lnSpc>
+              <a:spcBef>
+                <a:spcPts val="0"/>
+              </a:spcBef>
+              <a:spcAft>
+                <a:spcPts val="600"/>
+              </a:spcAft>
+            </a:pPr>
+            <a:r>
+              <a:rPr sz="1250" b="1">
+                <a:solidFill>
+                  <a:srgbClr val="1B3A6B"/>
+                </a:solidFill>
+                <a:latin typeface="PingFang SC"/>
+                <a:ea typeface="PingFang SC"/>
+              </a:rPr>
+              <a:t>最终 JSON 输出</a:t>
+            </a:r>
+          </a:p>
+        </p:txBody>
+      </p:sp>
+      <p:sp>
+        <p:nvSpPr>
+          <p:cNvPr id="31" name="TextBox 30"/>
+          <p:cNvSpPr txBox="1"/>
+          <p:nvPr/>
+        </p:nvSpPr>
+        <p:spPr>
+          <a:xfrm>
+            <a:off x="6016752" y="4224528"/>
+            <a:ext cx="2834640" cy="347472"/>
+          </a:xfrm>
+          <a:prstGeom prst="rect">
+            <a:avLst/>
+          </a:prstGeom>
+          <a:noFill/>
+        </p:spPr>
+        <p:txBody>
+          <a:bodyPr wrap="square" anchor="ctr" lIns="25400" rIns="25400" tIns="12700" bIns="12700">
+            <a:spAutoFit/>
+          </a:bodyPr>
+          <a:lstStyle/>
+          <a:p>
+            <a:pPr algn="l">
+              <a:lnSpc>
+                <a:spcPct val="100000"/>
+              </a:lnSpc>
+              <a:spcBef>
+                <a:spcPts val="0"/>
+              </a:spcBef>
+              <a:spcAft>
+                <a:spcPts val="600"/>
+              </a:spcAft>
+            </a:pPr>
+            <a:r>
+              <a:rPr sz="950" b="0">
+                <a:solidFill>
+                  <a:srgbClr val="5F6670"/>
+                </a:solidFill>
+                <a:latin typeface="PingFang SC"/>
+                <a:ea typeface="PingFang SC"/>
+              </a:rPr>
+              <a:t>固定 schema，无人值守可稳定解析</a:t>
+            </a:r>
+          </a:p>
+        </p:txBody>
+      </p:sp>
+      <p:sp>
+        <p:nvSpPr>
+          <p:cNvPr id="32" name="TextBox 31"/>
+          <p:cNvSpPr txBox="1"/>
+          <p:nvPr/>
+        </p:nvSpPr>
+        <p:spPr>
+          <a:xfrm>
+            <a:off x="8869680" y="3886200"/>
+            <a:ext cx="502920" cy="292608"/>
+          </a:xfrm>
+          <a:prstGeom prst="rect">
+            <a:avLst/>
+          </a:prstGeom>
+          <a:noFill/>
+        </p:spPr>
+        <p:txBody>
+          <a:bodyPr wrap="square" anchor="ctr" lIns="25400" rIns="25400" tIns="12700" bIns="12700">
+            <a:spAutoFit/>
+          </a:bodyPr>
+          <a:lstStyle/>
+          <a:p>
+            <a:pPr algn="l">
+              <a:lnSpc>
+                <a:spcPct val="105000"/>
+              </a:lnSpc>
+              <a:spcBef>
+                <a:spcPts val="0"/>
+              </a:spcBef>
+              <a:spcAft>
+                <a:spcPts val="600"/>
+              </a:spcAft>
+            </a:pPr>
+            <a:r>
+              <a:rPr sz="1100" b="0">
+                <a:solidFill>
+                  <a:srgbClr val="5F6670"/>
+                </a:solidFill>
+                <a:latin typeface="PingFang SC"/>
+                <a:ea typeface="PingFang SC"/>
+              </a:rPr>
+              <a:t>专家</a:t>
+            </a:r>
+          </a:p>
+        </p:txBody>
+      </p:sp>
+      <p:sp>
+        <p:nvSpPr>
+          <p:cNvPr id="33" name="TextBox 32"/>
+          <p:cNvSpPr txBox="1"/>
+          <p:nvPr/>
+        </p:nvSpPr>
+        <p:spPr>
+          <a:xfrm>
+            <a:off x="9418320" y="3840480"/>
+            <a:ext cx="2240280" cy="347472"/>
+          </a:xfrm>
+          <a:prstGeom prst="rect">
+            <a:avLst/>
+          </a:prstGeom>
+          <a:noFill/>
+        </p:spPr>
+        <p:txBody>
+          <a:bodyPr wrap="square" anchor="ctr" lIns="25400" rIns="25400" tIns="12700" bIns="12700">
+            <a:spAutoFit/>
+          </a:bodyPr>
+          <a:lstStyle/>
+          <a:p>
+            <a:pPr algn="l">
+              <a:lnSpc>
+                <a:spcPct val="105000"/>
+              </a:lnSpc>
+              <a:spcBef>
+                <a:spcPts val="0"/>
+              </a:spcBef>
+              <a:spcAft>
+                <a:spcPts val="600"/>
+              </a:spcAft>
+            </a:pPr>
+            <a:r>
+              <a:rPr sz="1350" b="1">
+                <a:solidFill>
+                  <a:srgbClr val="2E8B57"/>
+                </a:solidFill>
+                <a:latin typeface="PingFang SC"/>
+                <a:ea typeface="PingFang SC"/>
+              </a:rPr>
+              <a:t>末轮固定</a:t>
+            </a:r>
+          </a:p>
+        </p:txBody>
+      </p:sp>
+      <p:sp>
+        <p:nvSpPr>
+          <p:cNvPr id="34" name="TextBox 33"/>
+          <p:cNvSpPr txBox="1"/>
+          <p:nvPr/>
+        </p:nvSpPr>
+        <p:spPr>
+          <a:xfrm>
+            <a:off x="8869680" y="4251960"/>
+            <a:ext cx="502920" cy="292608"/>
+          </a:xfrm>
+          <a:prstGeom prst="rect">
+            <a:avLst/>
+          </a:prstGeom>
+          <a:noFill/>
+        </p:spPr>
+        <p:txBody>
+          <a:bodyPr wrap="square" anchor="ctr" lIns="25400" rIns="25400" tIns="12700" bIns="12700">
+            <a:spAutoFit/>
+          </a:bodyPr>
+          <a:lstStyle/>
+          <a:p>
+            <a:pPr algn="l">
+              <a:lnSpc>
+                <a:spcPct val="105000"/>
+              </a:lnSpc>
+              <a:spcBef>
+                <a:spcPts val="0"/>
+              </a:spcBef>
+              <a:spcAft>
+                <a:spcPts val="600"/>
+              </a:spcAft>
+            </a:pPr>
+            <a:r>
+              <a:rPr sz="1100" b="0">
+                <a:solidFill>
+                  <a:srgbClr val="5F6670"/>
+                </a:solidFill>
+                <a:latin typeface="PingFang SC"/>
+                <a:ea typeface="PingFang SC"/>
+              </a:rPr>
+              <a:t>普通</a:t>
+            </a:r>
+          </a:p>
+        </p:txBody>
+      </p:sp>
+      <p:sp>
+        <p:nvSpPr>
+          <p:cNvPr id="35" name="TextBox 34"/>
+          <p:cNvSpPr txBox="1"/>
+          <p:nvPr/>
+        </p:nvSpPr>
+        <p:spPr>
+          <a:xfrm>
+            <a:off x="9418320" y="4206240"/>
+            <a:ext cx="2240280" cy="347472"/>
+          </a:xfrm>
+          <a:prstGeom prst="rect">
+            <a:avLst/>
+          </a:prstGeom>
+          <a:noFill/>
+        </p:spPr>
+        <p:txBody>
+          <a:bodyPr wrap="square" anchor="ctr" lIns="25400" rIns="25400" tIns="12700" bIns="12700">
+            <a:spAutoFit/>
+          </a:bodyPr>
+          <a:lstStyle/>
+          <a:p>
+            <a:pPr algn="l">
+              <a:lnSpc>
+                <a:spcPct val="105000"/>
+              </a:lnSpc>
+              <a:spcBef>
+                <a:spcPts val="0"/>
+              </a:spcBef>
+              <a:spcAft>
+                <a:spcPts val="600"/>
+              </a:spcAft>
+            </a:pPr>
+            <a:r>
+              <a:rPr sz="1350" b="1">
+                <a:solidFill>
+                  <a:srgbClr val="4F6B9A"/>
+                </a:solidFill>
+                <a:latin typeface="PingFang SC"/>
+                <a:ea typeface="PingFang SC"/>
+              </a:rPr>
+              <a:t>1 次错位</a:t>
+            </a:r>
+          </a:p>
+        </p:txBody>
+      </p:sp>
+      <p:sp>
+        <p:nvSpPr>
+          <p:cNvPr id="36" name="Rounded Rectangle 35"/>
+          <p:cNvSpPr/>
+          <p:nvPr/>
+        </p:nvSpPr>
+        <p:spPr>
+          <a:xfrm>
+            <a:off x="5806440" y="4700016"/>
+            <a:ext cx="5897880" cy="850392"/>
+          </a:xfrm>
+          <a:prstGeom prst="roundRect">
+            <a:avLst>
+              <a:gd name="adj" fmla="val 8000"/>
+            </a:avLst>
+          </a:prstGeom>
+          <a:solidFill>
+            <a:srgbClr val="F4F6F9"/>
+          </a:solidFill>
+          <a:ln>
+            <a:noFill/>
+          </a:ln>
+          <a:effectLst/>
+        </p:spPr>
+        <p:style>
+          <a:lnRef idx="1">
+            <a:schemeClr val="accent1"/>
+          </a:lnRef>
+          <a:fillRef idx="3">
+            <a:schemeClr val="accent1"/>
+          </a:fillRef>
+          <a:effectRef idx="2">
+            <a:schemeClr val="accent1"/>
+          </a:effectRef>
+          <a:fontRef idx="minor">
+            <a:schemeClr val="lt1"/>
+          </a:fontRef>
+        </p:style>
+        <p:txBody>
+          <a:bodyPr rtlCol="0" anchor="ctr"/>
+          <a:lstStyle/>
+          <a:p>
+            <a:pPr algn="ctr"/>
+          </a:p>
+        </p:txBody>
+      </p:sp>
+      <p:sp>
+        <p:nvSpPr>
+          <p:cNvPr id="37" name="Rectangle 36"/>
+          <p:cNvSpPr/>
+          <p:nvPr/>
+        </p:nvSpPr>
+        <p:spPr>
+          <a:xfrm>
+            <a:off x="5806440" y="4700016"/>
+            <a:ext cx="73152" cy="850392"/>
+          </a:xfrm>
+          <a:prstGeom prst="rect">
+            <a:avLst/>
+          </a:prstGeom>
+          <a:solidFill>
+            <a:srgbClr val="2E8B57"/>
+          </a:solidFill>
+          <a:ln>
+            <a:noFill/>
+          </a:ln>
+          <a:effectLst/>
+        </p:spPr>
+        <p:style>
+          <a:lnRef idx="1">
+            <a:schemeClr val="accent1"/>
+          </a:lnRef>
+          <a:fillRef idx="3">
+            <a:schemeClr val="accent1"/>
+          </a:fillRef>
+          <a:effectRef idx="2">
+            <a:schemeClr val="accent1"/>
+          </a:effectRef>
+          <a:fontRef idx="minor">
+            <a:schemeClr val="lt1"/>
+          </a:fontRef>
+        </p:style>
+        <p:txBody>
+          <a:bodyPr rtlCol="0" anchor="ctr"/>
+          <a:lstStyle/>
+          <a:p>
+            <a:pPr algn="ctr"/>
+          </a:p>
+        </p:txBody>
+      </p:sp>
+      <p:sp>
+        <p:nvSpPr>
+          <p:cNvPr id="38" name="TextBox 37"/>
+          <p:cNvSpPr txBox="1"/>
+          <p:nvPr/>
+        </p:nvSpPr>
+        <p:spPr>
+          <a:xfrm>
+            <a:off x="6016752" y="4791456"/>
+            <a:ext cx="2788920" cy="329184"/>
+          </a:xfrm>
+          <a:prstGeom prst="rect">
+            <a:avLst/>
+          </a:prstGeom>
+          <a:noFill/>
+        </p:spPr>
+        <p:txBody>
+          <a:bodyPr wrap="square" anchor="ctr" lIns="25400" rIns="25400" tIns="12700" bIns="12700">
+            <a:spAutoFit/>
+          </a:bodyPr>
+          <a:lstStyle/>
+          <a:p>
+            <a:pPr algn="l">
+              <a:lnSpc>
+                <a:spcPct val="105000"/>
+              </a:lnSpc>
+              <a:spcBef>
+                <a:spcPts val="0"/>
+              </a:spcBef>
+              <a:spcAft>
+                <a:spcPts val="600"/>
+              </a:spcAft>
+            </a:pPr>
+            <a:r>
+              <a:rPr sz="1250" b="1">
+                <a:solidFill>
+                  <a:srgbClr val="1B3A6B"/>
+                </a:solidFill>
+                <a:latin typeface="PingFang SC"/>
+                <a:ea typeface="PingFang SC"/>
+              </a:rPr>
+              <a:t>检查覆盖与留痕</a:t>
+            </a:r>
+          </a:p>
+        </p:txBody>
+      </p:sp>
+      <p:sp>
+        <p:nvSpPr>
+          <p:cNvPr id="39" name="TextBox 38"/>
+          <p:cNvSpPr txBox="1"/>
+          <p:nvPr/>
+        </p:nvSpPr>
+        <p:spPr>
+          <a:xfrm>
+            <a:off x="6016752" y="5157216"/>
+            <a:ext cx="2834640" cy="347472"/>
+          </a:xfrm>
+          <a:prstGeom prst="rect">
+            <a:avLst/>
+          </a:prstGeom>
+          <a:noFill/>
+        </p:spPr>
+        <p:txBody>
+          <a:bodyPr wrap="square" anchor="ctr" lIns="25400" rIns="25400" tIns="12700" bIns="12700">
+            <a:spAutoFit/>
+          </a:bodyPr>
+          <a:lstStyle/>
+          <a:p>
+            <a:pPr algn="l">
+              <a:lnSpc>
+                <a:spcPct val="100000"/>
+              </a:lnSpc>
+              <a:spcBef>
+                <a:spcPts val="0"/>
+              </a:spcBef>
+              <a:spcAft>
+                <a:spcPts val="600"/>
+              </a:spcAft>
+            </a:pPr>
+            <a:r>
+              <a:rPr sz="950" b="0">
+                <a:solidFill>
+                  <a:srgbClr val="5F6670"/>
+                </a:solidFill>
+                <a:latin typeface="PingFang SC"/>
+                <a:ea typeface="PingFang SC"/>
+              </a:rPr>
+              <a:t>每步留 HTTP 状态、来源与复算脚本</a:t>
+            </a:r>
+          </a:p>
+        </p:txBody>
+      </p:sp>
+      <p:sp>
+        <p:nvSpPr>
+          <p:cNvPr id="40" name="TextBox 39"/>
+          <p:cNvSpPr txBox="1"/>
+          <p:nvPr/>
+        </p:nvSpPr>
+        <p:spPr>
+          <a:xfrm>
+            <a:off x="8869680" y="4818888"/>
+            <a:ext cx="502920" cy="292608"/>
+          </a:xfrm>
+          <a:prstGeom prst="rect">
+            <a:avLst/>
+          </a:prstGeom>
+          <a:noFill/>
+        </p:spPr>
+        <p:txBody>
+          <a:bodyPr wrap="square" anchor="ctr" lIns="25400" rIns="25400" tIns="12700" bIns="12700">
+            <a:spAutoFit/>
+          </a:bodyPr>
+          <a:lstStyle/>
+          <a:p>
+            <a:pPr algn="l">
+              <a:lnSpc>
+                <a:spcPct val="105000"/>
+              </a:lnSpc>
+              <a:spcBef>
+                <a:spcPts val="0"/>
+              </a:spcBef>
+              <a:spcAft>
+                <a:spcPts val="600"/>
+              </a:spcAft>
+            </a:pPr>
+            <a:r>
+              <a:rPr sz="1100" b="0">
+                <a:solidFill>
+                  <a:srgbClr val="5F6670"/>
+                </a:solidFill>
+                <a:latin typeface="PingFang SC"/>
+                <a:ea typeface="PingFang SC"/>
+              </a:rPr>
+              <a:t>专家</a:t>
+            </a:r>
+          </a:p>
+        </p:txBody>
+      </p:sp>
+      <p:sp>
+        <p:nvSpPr>
+          <p:cNvPr id="41" name="TextBox 40"/>
+          <p:cNvSpPr txBox="1"/>
+          <p:nvPr/>
+        </p:nvSpPr>
+        <p:spPr>
+          <a:xfrm>
+            <a:off x="9418320" y="4773168"/>
+            <a:ext cx="2240280" cy="347472"/>
+          </a:xfrm>
+          <a:prstGeom prst="rect">
+            <a:avLst/>
+          </a:prstGeom>
+          <a:noFill/>
+        </p:spPr>
+        <p:txBody>
+          <a:bodyPr wrap="square" anchor="ctr" lIns="25400" rIns="25400" tIns="12700" bIns="12700">
+            <a:spAutoFit/>
+          </a:bodyPr>
+          <a:lstStyle/>
+          <a:p>
+            <a:pPr algn="l">
+              <a:lnSpc>
+                <a:spcPct val="105000"/>
+              </a:lnSpc>
+              <a:spcBef>
+                <a:spcPts val="0"/>
+              </a:spcBef>
+              <a:spcAft>
+                <a:spcPts val="600"/>
+              </a:spcAft>
+            </a:pPr>
+            <a:r>
+              <a:rPr sz="1350" b="1">
+                <a:solidFill>
+                  <a:srgbClr val="2E8B57"/>
+                </a:solidFill>
+                <a:latin typeface="PingFang SC"/>
+                <a:ea typeface="PingFang SC"/>
+              </a:rPr>
+              <a:t>强制全检</a:t>
+            </a:r>
+          </a:p>
+        </p:txBody>
+      </p:sp>
+      <p:sp>
+        <p:nvSpPr>
+          <p:cNvPr id="42" name="TextBox 41"/>
+          <p:cNvSpPr txBox="1"/>
+          <p:nvPr/>
+        </p:nvSpPr>
+        <p:spPr>
+          <a:xfrm>
+            <a:off x="8869680" y="5184648"/>
+            <a:ext cx="502920" cy="292608"/>
+          </a:xfrm>
+          <a:prstGeom prst="rect">
+            <a:avLst/>
+          </a:prstGeom>
+          <a:noFill/>
+        </p:spPr>
+        <p:txBody>
+          <a:bodyPr wrap="square" anchor="ctr" lIns="25400" rIns="25400" tIns="12700" bIns="12700">
+            <a:spAutoFit/>
+          </a:bodyPr>
+          <a:lstStyle/>
+          <a:p>
+            <a:pPr algn="l">
+              <a:lnSpc>
+                <a:spcPct val="105000"/>
+              </a:lnSpc>
+              <a:spcBef>
+                <a:spcPts val="0"/>
+              </a:spcBef>
+              <a:spcAft>
+                <a:spcPts val="600"/>
+              </a:spcAft>
+            </a:pPr>
+            <a:r>
+              <a:rPr sz="1100" b="0">
+                <a:solidFill>
+                  <a:srgbClr val="5F6670"/>
+                </a:solidFill>
+                <a:latin typeface="PingFang SC"/>
+                <a:ea typeface="PingFang SC"/>
+              </a:rPr>
+              <a:t>普通</a:t>
+            </a:r>
+          </a:p>
+        </p:txBody>
+      </p:sp>
+      <p:sp>
+        <p:nvSpPr>
+          <p:cNvPr id="43" name="TextBox 42"/>
+          <p:cNvSpPr txBox="1"/>
+          <p:nvPr/>
+        </p:nvSpPr>
+        <p:spPr>
+          <a:xfrm>
+            <a:off x="9418320" y="5138928"/>
+            <a:ext cx="2240280" cy="347472"/>
+          </a:xfrm>
+          <a:prstGeom prst="rect">
+            <a:avLst/>
+          </a:prstGeom>
+          <a:noFill/>
+        </p:spPr>
+        <p:txBody>
+          <a:bodyPr wrap="square" anchor="ctr" lIns="25400" rIns="25400" tIns="12700" bIns="12700">
+            <a:spAutoFit/>
+          </a:bodyPr>
+          <a:lstStyle/>
+          <a:p>
+            <a:pPr algn="l">
+              <a:lnSpc>
+                <a:spcPct val="105000"/>
+              </a:lnSpc>
+              <a:spcBef>
+                <a:spcPts val="0"/>
+              </a:spcBef>
+              <a:spcAft>
+                <a:spcPts val="600"/>
+              </a:spcAft>
+            </a:pPr>
+            <a:r>
+              <a:rPr sz="1350" b="1">
+                <a:solidFill>
+                  <a:srgbClr val="4F6B9A"/>
+                </a:solidFill>
+                <a:latin typeface="PingFang SC"/>
+                <a:ea typeface="PingFang SC"/>
+              </a:rPr>
+              <a:t>临场发挥</a:t>
+            </a:r>
+          </a:p>
+        </p:txBody>
+      </p:sp>
+      <p:sp>
+        <p:nvSpPr>
+          <p:cNvPr id="44" name="Rounded Rectangle 43"/>
+          <p:cNvSpPr/>
+          <p:nvPr/>
+        </p:nvSpPr>
+        <p:spPr>
+          <a:xfrm>
+            <a:off x="502920" y="5760720"/>
+            <a:ext cx="11201400" cy="932688"/>
+          </a:xfrm>
+          <a:prstGeom prst="roundRect">
+            <a:avLst>
+              <a:gd name="adj" fmla="val 8000"/>
+            </a:avLst>
+          </a:prstGeom>
+          <a:solidFill>
+            <a:srgbClr val="EEF2F8"/>
+          </a:solidFill>
+          <a:ln>
+            <a:noFill/>
+          </a:ln>
+          <a:effectLst/>
+        </p:spPr>
+        <p:style>
+          <a:lnRef idx="1">
+            <a:schemeClr val="accent1"/>
+          </a:lnRef>
+          <a:fillRef idx="3">
+            <a:schemeClr val="accent1"/>
+          </a:fillRef>
+          <a:effectRef idx="2">
+            <a:schemeClr val="accent1"/>
+          </a:effectRef>
+          <a:fontRef idx="minor">
+            <a:schemeClr val="lt1"/>
+          </a:fontRef>
+        </p:style>
+        <p:txBody>
+          <a:bodyPr rtlCol="0" anchor="ctr"/>
+          <a:lstStyle/>
+          <a:p>
+            <a:pPr algn="ctr"/>
+          </a:p>
+        </p:txBody>
+      </p:sp>
+      <p:sp>
+        <p:nvSpPr>
+          <p:cNvPr id="45" name="TextBox 44"/>
+          <p:cNvSpPr txBox="1"/>
+          <p:nvPr/>
+        </p:nvSpPr>
+        <p:spPr>
+          <a:xfrm>
+            <a:off x="731520" y="5815584"/>
+            <a:ext cx="10881360" cy="274320"/>
           </a:xfrm>
           <a:prstGeom prst="rect">
             <a:avLst/>
@@ -7634,28 +9374,28 @@
               </a:spcAft>
             </a:pPr>
             <a:r>
-              <a:rPr sz="1300" b="1">
+              <a:rPr sz="1250" b="1">
                 <a:solidFill>
                   <a:srgbClr val="1B3A6B"/>
                 </a:solidFill>
                 <a:latin typeface="PingFang SC"/>
                 <a:ea typeface="PingFang SC"/>
               </a:rPr>
-              <a:t>对照严谨性与诚实结论</a:t>
-            </a:r>
-          </a:p>
-        </p:txBody>
-      </p:sp>
-      <p:sp>
-        <p:nvSpPr>
-          <p:cNvPr id="13" name="TextBox 12"/>
+              <a:t>如何读这两个结果：诚实、不设弱对手</a:t>
+            </a:r>
+          </a:p>
+        </p:txBody>
+      </p:sp>
+      <p:sp>
+        <p:nvSpPr>
+          <p:cNvPr id="46" name="TextBox 45"/>
           <p:cNvSpPr txBox="1"/>
           <p:nvPr/>
         </p:nvSpPr>
         <p:spPr>
           <a:xfrm>
-            <a:off x="731520" y="6144768"/>
-            <a:ext cx="10881360" cy="548640"/>
+            <a:off x="731520" y="6089904"/>
+            <a:ext cx="10881360" cy="566928"/>
           </a:xfrm>
           <a:prstGeom prst="rect">
             <a:avLst/>
@@ -7670,47 +9410,47 @@
           <a:p>
             <a:pPr algn="l">
               <a:lnSpc>
-                <a:spcPct val="110000"/>
-              </a:lnSpc>
-              <a:spcBef>
-                <a:spcPts val="0"/>
-              </a:spcBef>
-              <a:spcAft>
-                <a:spcPts val="200"/>
-              </a:spcAft>
-            </a:pPr>
-            <a:r>
-              <a:rPr sz="1100" b="0">
+                <a:spcPct val="108000"/>
+              </a:lnSpc>
+              <a:spcBef>
+                <a:spcPts val="0"/>
+              </a:spcBef>
+              <a:spcAft>
+                <a:spcPts val="100"/>
+              </a:spcAft>
+            </a:pPr>
+            <a:r>
+              <a:rPr sz="1050" b="0">
                 <a:solidFill>
                   <a:srgbClr val="1A1B1C"/>
                 </a:solidFill>
                 <a:latin typeface="PingFang SC"/>
                 <a:ea typeface="PingFang SC"/>
               </a:rPr>
-              <a:t>· 增设工具全开、能联网但不给专家流程的普通 Agent 作对照，防止稻草人基线；撤稿、统计复算、2026 冷门撤稿限定任务同输入对照，两个联网 Agent 都能做对。</a:t>
+              <a:t>· H1 成立：联网是硬闸门，F1 0.62→1.0、误报 23→0；H2 阴性：强模型上专家流程不额外提高 F1，不宣称更准。</a:t>
             </a:r>
           </a:p>
           <a:p>
             <a:pPr algn="l">
               <a:lnSpc>
-                <a:spcPct val="110000"/>
-              </a:lnSpc>
-              <a:spcBef>
-                <a:spcPts val="0"/>
-              </a:spcBef>
-              <a:spcAft>
-                <a:spcPts val="200"/>
-              </a:spcAft>
-            </a:pPr>
-            <a:r>
-              <a:rPr sz="1100" b="0">
+                <a:spcPct val="108000"/>
+              </a:lnSpc>
+              <a:spcBef>
+                <a:spcPts val="0"/>
+              </a:spcBef>
+              <a:spcAft>
+                <a:spcPts val="100"/>
+              </a:spcAft>
+            </a:pPr>
+            <a:r>
+              <a:rPr sz="1050" b="0">
                 <a:solidFill>
                   <a:srgbClr val="1A1B1C"/>
                 </a:solidFill>
                 <a:latin typeface="PingFang SC"/>
                 <a:ea typeface="PingFang SC"/>
               </a:rPr>
-              <a:t>· 专家流程差异在过程：平均工具调用更少、无长期记忆污染、JSON 稳定可解析；全流程留证据、可审计。局限：仅单模型、n=48，弱模型增益待验。</a:t>
+              <a:t>· 专家流程价值在无人值守规模化时的确定性、效率与可审计；撤稿、统计复算、2026 冷门撤稿限定任务同输入对照均判对。局限：仅单模型、n=48（Wilson 下界 0.926）、弱模型增益待验。</a:t>
             </a:r>
           </a:p>
         </p:txBody>

--- a/assets/科研论文核查员.pptx
+++ b/assets/科研论文核查员.pptx
@@ -7481,7 +7481,7 @@
                 <a:latin typeface="PingFang SC"/>
                 <a:ea typeface="PingFang SC"/>
               </a:rPr>
-              <a:t>两个主结果：联网是能力闸门，流程固化确定性护栏</a:t>
+              <a:t>两个主结果：联网是能力闸门，流程固化可复现的过程约束</a:t>
             </a:r>
           </a:p>
         </p:txBody>
@@ -7825,7 +7825,7 @@
                 <a:latin typeface="PingFang SC"/>
                 <a:ea typeface="PingFang SC"/>
               </a:rPr>
-              <a:t>主结果② 确定性护栏：专家流程相对普通 Agent 的真实增益</a:t>
+              <a:t>主结果② 过程约束：专家工作流相对普通 Agent 的可审计增益</a:t>
             </a:r>
           </a:p>
         </p:txBody>
@@ -8007,7 +8007,7 @@
                 <a:latin typeface="PingFang SC"/>
                 <a:ea typeface="PingFang SC"/>
               </a:rPr>
-              <a:t>路径更短、token 更省（7 轮均值）</a:t>
+              <a:t>7 轮均值，路径更短、token 更省</a:t>
             </a:r>
           </a:p>
         </p:txBody>
@@ -8739,7 +8739,7 @@
                 <a:latin typeface="PingFang SC"/>
                 <a:ea typeface="PingFang SC"/>
               </a:rPr>
-              <a:t>固定 schema，无人值守可稳定解析</a:t>
+              <a:t>固定 schema，便于无人值守解析</a:t>
             </a:r>
           </a:p>
         </p:txBody>
@@ -9105,7 +9105,7 @@
                 <a:latin typeface="PingFang SC"/>
                 <a:ea typeface="PingFang SC"/>
               </a:rPr>
-              <a:t>每步留 HTTP 状态、来源与复算脚本</a:t>
+              <a:t>专家强制 C1-C4/M1-M5 全流程，留 HTTP 状态、来源、脚本</a:t>
             </a:r>
           </a:p>
         </p:txBody>
@@ -9197,7 +9197,7 @@
                 <a:latin typeface="PingFang SC"/>
                 <a:ea typeface="PingFang SC"/>
               </a:rPr>
-              <a:t>强制全检</a:t>
+              <a:t>全流程</a:t>
             </a:r>
           </a:p>
         </p:txBody>
@@ -9289,7 +9289,7 @@
                 <a:latin typeface="PingFang SC"/>
                 <a:ea typeface="PingFang SC"/>
               </a:rPr>
-              <a:t>临场发挥</a:t>
+              <a:t>基础取证</a:t>
             </a:r>
           </a:p>
         </p:txBody>
@@ -9302,8 +9302,8 @@
         </p:nvSpPr>
         <p:spPr>
           <a:xfrm>
-            <a:off x="502920" y="5760720"/>
-            <a:ext cx="11201400" cy="932688"/>
+            <a:off x="502920" y="5632704"/>
+            <a:ext cx="11201400" cy="1152144"/>
           </a:xfrm>
           <a:prstGeom prst="roundRect">
             <a:avLst>
@@ -9348,8 +9348,8 @@
         </p:nvSpPr>
         <p:spPr>
           <a:xfrm>
-            <a:off x="731520" y="5815584"/>
-            <a:ext cx="10881360" cy="274320"/>
+            <a:off x="731520" y="5678424"/>
+            <a:ext cx="10881360" cy="256032"/>
           </a:xfrm>
           <a:prstGeom prst="rect">
             <a:avLst/>
@@ -9374,7 +9374,7 @@
               </a:spcAft>
             </a:pPr>
             <a:r>
-              <a:rPr sz="1250" b="1">
+              <a:rPr sz="1200" b="1">
                 <a:solidFill>
                   <a:srgbClr val="1B3A6B"/>
                 </a:solidFill>
@@ -9394,8 +9394,8 @@
         </p:nvSpPr>
         <p:spPr>
           <a:xfrm>
-            <a:off x="731520" y="6089904"/>
-            <a:ext cx="10881360" cy="566928"/>
+            <a:off x="731520" y="5943600"/>
+            <a:ext cx="10927080" cy="822960"/>
           </a:xfrm>
           <a:prstGeom prst="rect">
             <a:avLst/>
@@ -9410,7 +9410,7 @@
           <a:p>
             <a:pPr algn="l">
               <a:lnSpc>
-                <a:spcPct val="108000"/>
+                <a:spcPct val="105000"/>
               </a:lnSpc>
               <a:spcBef>
                 <a:spcPts val="0"/>
@@ -9420,7 +9420,7 @@
               </a:spcAft>
             </a:pPr>
             <a:r>
-              <a:rPr sz="1050" b="0">
+              <a:rPr sz="1000" b="0">
                 <a:solidFill>
                   <a:srgbClr val="1A1B1C"/>
                 </a:solidFill>
@@ -9433,7 +9433,7 @@
           <a:p>
             <a:pPr algn="l">
               <a:lnSpc>
-                <a:spcPct val="108000"/>
+                <a:spcPct val="105000"/>
               </a:lnSpc>
               <a:spcBef>
                 <a:spcPts val="0"/>
@@ -9443,14 +9443,37 @@
               </a:spcAft>
             </a:pPr>
             <a:r>
-              <a:rPr sz="1050" b="0">
+              <a:rPr sz="1000" b="0">
                 <a:solidFill>
                   <a:srgbClr val="1A1B1C"/>
                 </a:solidFill>
                 <a:latin typeface="PingFang SC"/>
                 <a:ea typeface="PingFang SC"/>
               </a:rPr>
-              <a:t>· 专家流程价值在无人值守规模化时的确定性、效率与可审计；撤稿、统计复算、2026 冷门撤稿限定任务同输入对照均判对。局限：仅单模型、n=48（Wilson 下界 0.926）、弱模型增益待验。</a:t>
+              <a:t>· 专家流程是提示词/工作流层约束（非代码级强制）；右侧过程指标为 n=7 对 n=7 的小样本观测，“0 次/1 次”是观察到的事件，未做统计检验，不作为显著结论。</a:t>
+            </a:r>
+          </a:p>
+          <a:p>
+            <a:pPr algn="l">
+              <a:lnSpc>
+                <a:spcPct val="105000"/>
+              </a:lnSpc>
+              <a:spcBef>
+                <a:spcPts val="0"/>
+              </a:spcBef>
+              <a:spcAft>
+                <a:spcPts val="100"/>
+              </a:spcAft>
+            </a:pPr>
+            <a:r>
+              <a:rPr sz="1000" b="0">
+                <a:solidFill>
+                  <a:srgbClr val="1A1B1C"/>
+                </a:solidFill>
+                <a:latin typeface="PingFang SC"/>
+                <a:ea typeface="PingFang SC"/>
+              </a:rPr>
+              <a:t>· 撤稿、统计复算、2026 冷门撤稿限定任务同输入对照均判对；局限：仅单模型、n=48（Wilson 下界 0.926）、弱模型增益待验。</a:t>
             </a:r>
           </a:p>
         </p:txBody>
@@ -9799,8 +9822,8 @@
         </p:nvSpPr>
         <p:spPr>
           <a:xfrm>
-            <a:off x="749808" y="2084831"/>
-            <a:ext cx="3209544" cy="548640"/>
+            <a:off x="749808" y="2048256"/>
+            <a:ext cx="3209544" cy="502920"/>
           </a:xfrm>
           <a:prstGeom prst="rect">
             <a:avLst/>
@@ -9845,8 +9868,8 @@
         </p:nvSpPr>
         <p:spPr>
           <a:xfrm>
-            <a:off x="749808" y="2670048"/>
-            <a:ext cx="3209544" cy="868680"/>
+            <a:off x="749808" y="2578608"/>
+            <a:ext cx="3209544" cy="749808"/>
           </a:xfrm>
           <a:prstGeom prst="rect">
             <a:avLst/>
@@ -9861,7 +9884,7 @@
           <a:p>
             <a:pPr algn="l">
               <a:lnSpc>
-                <a:spcPct val="115000"/>
+                <a:spcPct val="112000"/>
               </a:lnSpc>
               <a:spcBef>
                 <a:spcPts val="0"/>
@@ -9871,7 +9894,7 @@
               </a:spcAft>
             </a:pPr>
             <a:r>
-              <a:rPr sz="1200" b="0">
+              <a:rPr sz="1150" b="0">
                 <a:solidFill>
                   <a:srgbClr val="1A1B1C"/>
                 </a:solidFill>
@@ -9891,8 +9914,8 @@
         </p:nvSpPr>
         <p:spPr>
           <a:xfrm>
-            <a:off x="749808" y="3493008"/>
-            <a:ext cx="3209544" cy="320040"/>
+            <a:off x="749808" y="3419856"/>
+            <a:ext cx="3264408" cy="384048"/>
           </a:xfrm>
           <a:prstGeom prst="rect">
             <a:avLst/>
@@ -9907,7 +9930,7 @@
           <a:p>
             <a:pPr algn="l">
               <a:lnSpc>
-                <a:spcPct val="105000"/>
+                <a:spcPct val="100000"/>
               </a:lnSpc>
               <a:spcBef>
                 <a:spcPts val="0"/>
@@ -9917,14 +9940,14 @@
               </a:spcAft>
             </a:pPr>
             <a:r>
-              <a:rPr sz="1050" b="0">
+              <a:rPr sz="900" b="0">
                 <a:solidFill>
                   <a:srgbClr val="4F6B9A"/>
                 </a:solidFill>
                 <a:latin typeface="PingFang SC"/>
                 <a:ea typeface="PingFang SC"/>
               </a:rPr>
-              <a:t>sciencepal.ai/share/ee4068d7…</a:t>
+              <a:t>sciencepal.ai/share/ee4068d7-07e5-4a27-9af7-1f3c50fedcaa</a:t>
             </a:r>
           </a:p>
         </p:txBody>
@@ -10029,8 +10052,8 @@
         </p:nvSpPr>
         <p:spPr>
           <a:xfrm>
-            <a:off x="4526280" y="2084831"/>
-            <a:ext cx="3209544" cy="548640"/>
+            <a:off x="4526280" y="2048256"/>
+            <a:ext cx="3209544" cy="502920"/>
           </a:xfrm>
           <a:prstGeom prst="rect">
             <a:avLst/>
@@ -10075,8 +10098,8 @@
         </p:nvSpPr>
         <p:spPr>
           <a:xfrm>
-            <a:off x="4526280" y="2670048"/>
-            <a:ext cx="3209544" cy="868680"/>
+            <a:off x="4526280" y="2578608"/>
+            <a:ext cx="3209544" cy="749808"/>
           </a:xfrm>
           <a:prstGeom prst="rect">
             <a:avLst/>
@@ -10091,7 +10114,7 @@
           <a:p>
             <a:pPr algn="l">
               <a:lnSpc>
-                <a:spcPct val="115000"/>
+                <a:spcPct val="112000"/>
               </a:lnSpc>
               <a:spcBef>
                 <a:spcPts val="0"/>
@@ -10101,7 +10124,7 @@
               </a:spcAft>
             </a:pPr>
             <a:r>
-              <a:rPr sz="1200" b="0">
+              <a:rPr sz="1150" b="0">
                 <a:solidFill>
                   <a:srgbClr val="1A1B1C"/>
                 </a:solidFill>
@@ -10121,8 +10144,8 @@
         </p:nvSpPr>
         <p:spPr>
           <a:xfrm>
-            <a:off x="4526280" y="3493008"/>
-            <a:ext cx="3209544" cy="320040"/>
+            <a:off x="4526280" y="3419856"/>
+            <a:ext cx="3264408" cy="384048"/>
           </a:xfrm>
           <a:prstGeom prst="rect">
             <a:avLst/>
@@ -10137,7 +10160,7 @@
           <a:p>
             <a:pPr algn="l">
               <a:lnSpc>
-                <a:spcPct val="105000"/>
+                <a:spcPct val="100000"/>
               </a:lnSpc>
               <a:spcBef>
                 <a:spcPts val="0"/>
@@ -10147,14 +10170,14 @@
               </a:spcAft>
             </a:pPr>
             <a:r>
-              <a:rPr sz="1050" b="0">
+              <a:rPr sz="900" b="0">
                 <a:solidFill>
                   <a:srgbClr val="4F6B9A"/>
                 </a:solidFill>
                 <a:latin typeface="PingFang SC"/>
                 <a:ea typeface="PingFang SC"/>
               </a:rPr>
-              <a:t>sciencepal.ai/share/f6f8746c…</a:t>
+              <a:t>sciencepal.ai/share/f6f8746c-3350-48f1-ac58-d0150e135ac1</a:t>
             </a:r>
           </a:p>
         </p:txBody>
@@ -10259,8 +10282,8 @@
         </p:nvSpPr>
         <p:spPr>
           <a:xfrm>
-            <a:off x="8302752" y="2084831"/>
-            <a:ext cx="3209544" cy="548640"/>
+            <a:off x="8302752" y="2048256"/>
+            <a:ext cx="3209544" cy="502920"/>
           </a:xfrm>
           <a:prstGeom prst="rect">
             <a:avLst/>
@@ -10305,8 +10328,8 @@
         </p:nvSpPr>
         <p:spPr>
           <a:xfrm>
-            <a:off x="8302752" y="2670048"/>
-            <a:ext cx="3209544" cy="868680"/>
+            <a:off x="8302752" y="2578608"/>
+            <a:ext cx="3209544" cy="749808"/>
           </a:xfrm>
           <a:prstGeom prst="rect">
             <a:avLst/>
@@ -10321,7 +10344,7 @@
           <a:p>
             <a:pPr algn="l">
               <a:lnSpc>
-                <a:spcPct val="115000"/>
+                <a:spcPct val="112000"/>
               </a:lnSpc>
               <a:spcBef>
                 <a:spcPts val="0"/>
@@ -10331,7 +10354,7 @@
               </a:spcAft>
             </a:pPr>
             <a:r>
-              <a:rPr sz="1200" b="0">
+              <a:rPr sz="1150" b="0">
                 <a:solidFill>
                   <a:srgbClr val="1A1B1C"/>
                 </a:solidFill>
@@ -10351,8 +10374,8 @@
         </p:nvSpPr>
         <p:spPr>
           <a:xfrm>
-            <a:off x="8302752" y="3493008"/>
-            <a:ext cx="3209544" cy="320040"/>
+            <a:off x="8302752" y="3419856"/>
+            <a:ext cx="3264408" cy="384048"/>
           </a:xfrm>
           <a:prstGeom prst="rect">
             <a:avLst/>
@@ -10367,7 +10390,7 @@
           <a:p>
             <a:pPr algn="l">
               <a:lnSpc>
-                <a:spcPct val="105000"/>
+                <a:spcPct val="100000"/>
               </a:lnSpc>
               <a:spcBef>
                 <a:spcPts val="0"/>
@@ -10377,14 +10400,14 @@
               </a:spcAft>
             </a:pPr>
             <a:r>
-              <a:rPr sz="1050" b="0">
+              <a:rPr sz="900" b="0">
                 <a:solidFill>
                   <a:srgbClr val="4F6B9A"/>
                 </a:solidFill>
                 <a:latin typeface="PingFang SC"/>
                 <a:ea typeface="PingFang SC"/>
               </a:rPr>
-              <a:t>sciencepal.ai/share/8de1f3cc…</a:t>
+              <a:t>sciencepal.ai/share/8de1f3cc-cde0-41ad-a2b5-b3b9af5a004b</a:t>
             </a:r>
           </a:p>
         </p:txBody>

--- a/assets/科研论文核查员.pptx
+++ b/assets/科研论文核查员.pptx
@@ -7378,6 +7378,98 @@
           </a:p>
         </p:txBody>
       </p:sp>
+      <p:sp>
+        <p:nvSpPr>
+          <p:cNvPr id="36" name="Rounded Rectangle 35"/>
+          <p:cNvSpPr/>
+          <p:nvPr/>
+        </p:nvSpPr>
+        <p:spPr>
+          <a:xfrm>
+            <a:off x="502920" y="5907024"/>
+            <a:ext cx="11201400" cy="530352"/>
+          </a:xfrm>
+          <a:prstGeom prst="roundRect">
+            <a:avLst>
+              <a:gd name="adj" fmla="val 8000"/>
+            </a:avLst>
+          </a:prstGeom>
+          <a:solidFill>
+            <a:srgbClr val="EEF2F8"/>
+          </a:solidFill>
+          <a:ln>
+            <a:noFill/>
+          </a:ln>
+          <a:effectLst/>
+        </p:spPr>
+        <p:style>
+          <a:lnRef idx="1">
+            <a:schemeClr val="accent1"/>
+          </a:lnRef>
+          <a:fillRef idx="3">
+            <a:schemeClr val="accent1"/>
+          </a:fillRef>
+          <a:effectRef idx="2">
+            <a:schemeClr val="accent1"/>
+          </a:effectRef>
+          <a:fontRef idx="minor">
+            <a:schemeClr val="lt1"/>
+          </a:fontRef>
+        </p:style>
+        <p:txBody>
+          <a:bodyPr rtlCol="0" anchor="ctr"/>
+          <a:lstStyle/>
+          <a:p>
+            <a:pPr algn="ctr"/>
+          </a:p>
+        </p:txBody>
+      </p:sp>
+      <p:sp>
+        <p:nvSpPr>
+          <p:cNvPr id="37" name="TextBox 36"/>
+          <p:cNvSpPr txBox="1"/>
+          <p:nvPr/>
+        </p:nvSpPr>
+        <p:spPr>
+          <a:xfrm>
+            <a:off x="731520" y="5943600"/>
+            <a:ext cx="10881360" cy="457200"/>
+          </a:xfrm>
+          <a:prstGeom prst="rect">
+            <a:avLst/>
+          </a:prstGeom>
+          <a:noFill/>
+        </p:spPr>
+        <p:txBody>
+          <a:bodyPr wrap="square" anchor="ctr" lIns="25400" rIns="25400" tIns="12700" bIns="12700">
+            <a:spAutoFit/>
+          </a:bodyPr>
+          <a:lstStyle/>
+          <a:p>
+            <a:pPr algn="l">
+              <a:lnSpc>
+                <a:spcPct val="105000"/>
+              </a:lnSpc>
+              <a:spcBef>
+                <a:spcPts val="0"/>
+              </a:spcBef>
+              <a:spcAft>
+                <a:spcPts val="600"/>
+              </a:spcAft>
+            </a:pPr>
+            <a:r>
+              <a:rPr sz="1050" b="0">
+                <a:solidFill>
+                  <a:srgbClr val="1B3A6B"/>
+                </a:solidFill>
+                <a:latin typeface="PingFang SC"/>
+                <a:ea typeface="PingFang SC"/>
+              </a:rPr>
+              <a:t>SciencePal 的作用：提供 Agent 运行环境、可联网沙箱与工具编排，并保留可回放的运行记录；核查的每一次取证都在平台内真实执行，不是用它写文案或做 PPT。</a:t>
+            </a:r>
+          </a:p>
+        </p:txBody>
+      </p:sp>
     </p:spTree>
   </p:cSld>
   <p:clrMapOvr>
@@ -7481,7 +7573,7 @@
                 <a:latin typeface="PingFang SC"/>
                 <a:ea typeface="PingFang SC"/>
               </a:rPr>
-              <a:t>两个主结果：联网是能力闸门，流程固化可复现的过程约束</a:t>
+              <a:t>两个主结果：联网是能力闸门，代码级 guardrail 保证交付可解析</a:t>
             </a:r>
           </a:p>
         </p:txBody>
@@ -7527,7 +7619,7 @@
                 <a:latin typeface="PingFang SC"/>
                 <a:ea typeface="PingFang SC"/>
               </a:rPr>
-              <a:t>48 条独立测试集；三方对照（离线 / 普通联网 / 专家工作流），SSE 审计确认公平</a:t>
+              <a:t>48 条三方对照 + 6 例注入干预前后对照；回溯审计 35 个 run：专家 5/5、普通联网 2/4、离线 0/7 合规</a:t>
             </a:r>
           </a:p>
         </p:txBody>
@@ -7825,7 +7917,7 @@
                 <a:latin typeface="PingFang SC"/>
                 <a:ea typeface="PingFang SC"/>
               </a:rPr>
-              <a:t>主结果② 过程约束：专家工作流相对普通 Agent 的可审计增益</a:t>
+              <a:t>主结果② 代码级 guardrail：同一 Agent 加 / 不加，交付可用 6/6 vs 4/6</a:t>
             </a:r>
           </a:p>
         </p:txBody>
@@ -7961,7 +8053,7 @@
                 <a:latin typeface="PingFang SC"/>
                 <a:ea typeface="PingFang SC"/>
               </a:rPr>
-              <a:t>平均工具调用 / 轮</a:t>
+              <a:t>交付可用率（6 例注入）</a:t>
             </a:r>
           </a:p>
         </p:txBody>
@@ -8007,7 +8099,7 @@
                 <a:latin typeface="PingFang SC"/>
                 <a:ea typeface="PingFang SC"/>
               </a:rPr>
-              <a:t>7 轮均值，路径更短、token 更省</a:t>
+              <a:t>可解析且结构/覆盖/证据/自洽四类校验全过</a:t>
             </a:r>
           </a:p>
         </p:txBody>
@@ -8099,7 +8191,7 @@
                 <a:latin typeface="PingFang SC"/>
                 <a:ea typeface="PingFang SC"/>
               </a:rPr>
-              <a:t>8.3</a:t>
+              <a:t>6/6</a:t>
             </a:r>
           </a:p>
         </p:txBody>
@@ -8191,7 +8283,7 @@
                 <a:latin typeface="PingFang SC"/>
                 <a:ea typeface="PingFang SC"/>
               </a:rPr>
-              <a:t>12.4</a:t>
+              <a:t>4/6</a:t>
             </a:r>
           </a:p>
         </p:txBody>
@@ -8327,7 +8419,7 @@
                 <a:latin typeface="PingFang SC"/>
                 <a:ea typeface="PingFang SC"/>
               </a:rPr>
-              <a:t>违禁写入长期记忆</a:t>
+              <a:t>契约违规（注入）</a:t>
             </a:r>
           </a:p>
         </p:txBody>
@@ -8373,7 +8465,7 @@
                 <a:latin typeface="PingFang SC"/>
                 <a:ea typeface="PingFang SC"/>
               </a:rPr>
-              <a:t>普通 Agent 被禁仍调用 save_memory</a:t>
+              <a:t>漏条目、改 schema 各 1 例，F1 直接归零</a:t>
             </a:r>
           </a:p>
         </p:txBody>
@@ -8557,7 +8649,7 @@
                 <a:latin typeface="PingFang SC"/>
                 <a:ea typeface="PingFang SC"/>
               </a:rPr>
-              <a:t>1 次</a:t>
+              <a:t>2 次</a:t>
             </a:r>
           </a:p>
         </p:txBody>
@@ -8693,7 +8785,7 @@
                 <a:latin typeface="PingFang SC"/>
                 <a:ea typeface="PingFang SC"/>
               </a:rPr>
-              <a:t>最终 JSON 输出</a:t>
+              <a:t>运行时拦截 / 自动修复</a:t>
             </a:r>
           </a:p>
         </p:txBody>
@@ -8739,7 +8831,7 @@
                 <a:latin typeface="PingFang SC"/>
                 <a:ea typeface="PingFang SC"/>
               </a:rPr>
-              <a:t>固定 schema，便于无人值守解析</a:t>
+              <a:t>save_memory 一出现即 stop 并纠正续跑</a:t>
             </a:r>
           </a:p>
         </p:txBody>
@@ -8831,7 +8923,7 @@
                 <a:latin typeface="PingFang SC"/>
                 <a:ea typeface="PingFang SC"/>
               </a:rPr>
-              <a:t>末轮固定</a:t>
+              <a:t>1 / 4</a:t>
             </a:r>
           </a:p>
         </p:txBody>
@@ -8923,7 +9015,7 @@
                 <a:latin typeface="PingFang SC"/>
                 <a:ea typeface="PingFang SC"/>
               </a:rPr>
-              <a:t>1 次错位</a:t>
+              <a:t>0 / 0</a:t>
             </a:r>
           </a:p>
         </p:txBody>
@@ -9059,7 +9151,7 @@
                 <a:latin typeface="PingFang SC"/>
                 <a:ea typeface="PingFang SC"/>
               </a:rPr>
-              <a:t>检查覆盖与留痕</a:t>
+              <a:t>校验器检测力（故障注入）</a:t>
             </a:r>
           </a:p>
         </p:txBody>
@@ -9105,7 +9197,7 @@
                 <a:latin typeface="PingFang SC"/>
                 <a:ea typeface="PingFang SC"/>
               </a:rPr>
-              <a:t>专家强制 C1-C4/M1-M5 全流程，留 HTTP 状态、来源、脚本</a:t>
+              <a:t>6 类失败模式 × 3 来源，同一套代码判定</a:t>
             </a:r>
           </a:p>
         </p:txBody>
@@ -9197,7 +9289,7 @@
                 <a:latin typeface="PingFang SC"/>
                 <a:ea typeface="PingFang SC"/>
               </a:rPr>
-              <a:t>全流程</a:t>
+              <a:t>18/18</a:t>
             </a:r>
           </a:p>
         </p:txBody>
@@ -9289,7 +9381,7 @@
                 <a:latin typeface="PingFang SC"/>
                 <a:ea typeface="PingFang SC"/>
               </a:rPr>
-              <a:t>基础取证</a:t>
+              <a:t>无此机制</a:t>
             </a:r>
           </a:p>
         </p:txBody>
@@ -9450,7 +9542,7 @@
                 <a:latin typeface="PingFang SC"/>
                 <a:ea typeface="PingFang SC"/>
               </a:rPr>
-              <a:t>· 专家流程是提示词/工作流层约束（非代码级强制）；右侧过程指标为 n=7 对 n=7 的小样本观测，“0 次/1 次”是观察到的事件，未做统计检验，不作为显著结论。</a:t>
+              <a:t>· 交付契约下沉到代码：平台关不掉记忆工具（9 种写法实测全无效），故拦截在运行时执行；注入实验把不可解析的交付从 2/6 降到 0/6。</a:t>
             </a:r>
           </a:p>
           <a:p>
@@ -9466,14 +9558,37 @@
               </a:spcAft>
             </a:pPr>
             <a:r>
-              <a:rPr sz="1000" b="0">
+              <a:rPr sz="950" b="0">
                 <a:solidFill>
                   <a:srgbClr val="1A1B1C"/>
                 </a:solidFill>
                 <a:latin typeface="PingFang SC"/>
                 <a:ea typeface="PingFang SC"/>
               </a:rPr>
-              <a:t>· 撤稿、统计复算、2026 冷门撤稿限定任务同输入对照均判对；局限：仅单模型、n=48（Wilson 下界 0.926）、弱模型增益待验。</a:t>
+              <a:t>· 局限：干净 48 条与 36 条规模上 guardrail 0 次干预、F1 不变；stop 只能中断不能撤销记忆（两组均 1/6）；修复代价 token +82%；注入 n=6 为定性证据。</a:t>
+            </a:r>
+          </a:p>
+          <a:p>
+            <a:pPr algn="l">
+              <a:lnSpc>
+                <a:spcPct val="105000"/>
+              </a:lnSpc>
+              <a:spcBef>
+                <a:spcPts val="0"/>
+              </a:spcBef>
+              <a:spcAft>
+                <a:spcPts val="100"/>
+              </a:spcAft>
+            </a:pPr>
+            <a:r>
+              <a:rPr sz="950" b="0">
+                <a:solidFill>
+                  <a:srgbClr val="1A1B1C"/>
+                </a:solidFill>
+                <a:latin typeface="PingFang SC"/>
+                <a:ea typeface="PingFang SC"/>
+              </a:rPr>
+              <a:t>· 泛化：换 deepseek-v4-pro 复现 4/4、F1 1.000；真实已发表论文的 50 条书目检出 4/4、误报 0。</a:t>
             </a:r>
           </a:p>
         </p:txBody>
@@ -9915,7 +10030,7 @@
         <p:spPr>
           <a:xfrm>
             <a:off x="749808" y="3419856"/>
-            <a:ext cx="3264408" cy="384048"/>
+            <a:ext cx="3337560" cy="384048"/>
           </a:xfrm>
           <a:prstGeom prst="rect">
             <a:avLst/>
@@ -9940,7 +10055,7 @@
               </a:spcAft>
             </a:pPr>
             <a:r>
-              <a:rPr sz="900" b="0">
+              <a:rPr sz="850" b="0">
                 <a:solidFill>
                   <a:srgbClr val="4F6B9A"/>
                 </a:solidFill>
@@ -10145,7 +10260,7 @@
         <p:spPr>
           <a:xfrm>
             <a:off x="4526280" y="3419856"/>
-            <a:ext cx="3264408" cy="384048"/>
+            <a:ext cx="3337560" cy="384048"/>
           </a:xfrm>
           <a:prstGeom prst="rect">
             <a:avLst/>
@@ -10170,7 +10285,7 @@
               </a:spcAft>
             </a:pPr>
             <a:r>
-              <a:rPr sz="900" b="0">
+              <a:rPr sz="850" b="0">
                 <a:solidFill>
                   <a:srgbClr val="4F6B9A"/>
                 </a:solidFill>
@@ -10375,7 +10490,7 @@
         <p:spPr>
           <a:xfrm>
             <a:off x="8302752" y="3419856"/>
-            <a:ext cx="3264408" cy="384048"/>
+            <a:ext cx="3337560" cy="384048"/>
           </a:xfrm>
           <a:prstGeom prst="rect">
             <a:avLst/>
@@ -10400,7 +10515,7 @@
               </a:spcAft>
             </a:pPr>
             <a:r>
-              <a:rPr sz="900" b="0">
+              <a:rPr sz="850" b="0">
                 <a:solidFill>
                   <a:srgbClr val="4F6B9A"/>
                 </a:solidFill>
@@ -10528,13 +10643,13 @@
           <a:p>
             <a:pPr algn="l">
               <a:lnSpc>
-                <a:spcPct val="118000"/>
-              </a:lnSpc>
-              <a:spcBef>
-                <a:spcPts val="0"/>
-              </a:spcBef>
-              <a:spcAft>
-                <a:spcPts val="400"/>
+                <a:spcPct val="112000"/>
+              </a:lnSpc>
+              <a:spcBef>
+                <a:spcPts val="0"/>
+              </a:spcBef>
+              <a:spcAft>
+                <a:spcPts val="300"/>
               </a:spcAft>
             </a:pPr>
             <a:r>
@@ -10545,19 +10660,19 @@
                 <a:latin typeface="PingFang SC"/>
                 <a:ea typeface="PingFang SC"/>
               </a:rPr>
-              <a:t>· 代码仓库：评测集生成 / 跑批 / 评分 / 审计全脚本</a:t>
+              <a:t>· 代码仓库：评测集 / 跑批 / 评分 / 审计 / guardrail 全脚本</a:t>
             </a:r>
           </a:p>
           <a:p>
             <a:pPr algn="l">
               <a:lnSpc>
-                <a:spcPct val="118000"/>
-              </a:lnSpc>
-              <a:spcBef>
-                <a:spcPts val="0"/>
-              </a:spcBef>
-              <a:spcAft>
-                <a:spcPts val="400"/>
+                <a:spcPct val="112000"/>
+              </a:lnSpc>
+              <a:spcBef>
+                <a:spcPts val="0"/>
+              </a:spcBef>
+              <a:spcAft>
+                <a:spcPts val="300"/>
               </a:spcAft>
             </a:pPr>
             <a:r>
@@ -10574,13 +10689,13 @@
           <a:p>
             <a:pPr algn="l">
               <a:lnSpc>
-                <a:spcPct val="118000"/>
-              </a:lnSpc>
-              <a:spcBef>
-                <a:spcPts val="0"/>
-              </a:spcBef>
-              <a:spcAft>
-                <a:spcPts val="400"/>
+                <a:spcPct val="112000"/>
+              </a:lnSpc>
+              <a:spcBef>
+                <a:spcPts val="0"/>
+              </a:spcBef>
+              <a:spcAft>
+                <a:spcPts val="300"/>
               </a:spcAft>
             </a:pPr>
             <a:r>
@@ -10591,19 +10706,42 @@
                 <a:latin typeface="PingFang SC"/>
                 <a:ea typeface="PingFang SC"/>
               </a:rPr>
-              <a:t>· 三方对照技术报告、逐条结果、12 run SSE 审计、Layer-2 案例</a:t>
+              <a:t>· 三方对照报告、逐条结果、SSE 审计、Layer-2 案例</a:t>
             </a:r>
           </a:p>
           <a:p>
             <a:pPr algn="l">
               <a:lnSpc>
-                <a:spcPct val="118000"/>
-              </a:lnSpc>
-              <a:spcBef>
-                <a:spcPts val="0"/>
-              </a:spcBef>
-              <a:spcAft>
-                <a:spcPts val="400"/>
+                <a:spcPct val="112000"/>
+              </a:lnSpc>
+              <a:spcBef>
+                <a:spcPts val="0"/>
+              </a:spcBef>
+              <a:spcAft>
+                <a:spcPts val="300"/>
+              </a:spcAft>
+            </a:pPr>
+            <a:r>
+              <a:rPr sz="1250" b="0">
+                <a:solidFill>
+                  <a:srgbClr val="1A1B1C"/>
+                </a:solidFill>
+                <a:latin typeface="PingFang SC"/>
+                <a:ea typeface="PingFang SC"/>
+              </a:rPr>
+              <a:t>· guardrail 协议与故障注入（可用率 6/6 vs 4/6）</a:t>
+            </a:r>
+          </a:p>
+          <a:p>
+            <a:pPr algn="l">
+              <a:lnSpc>
+                <a:spcPct val="112000"/>
+              </a:lnSpc>
+              <a:spcBef>
+                <a:spcPts val="0"/>
+              </a:spcBef>
+              <a:spcAft>
+                <a:spcPts val="300"/>
               </a:spcAft>
             </a:pPr>
             <a:r>
